--- a/RAG_Workshop_Fokusfolien.pptx
+++ b/RAG_Workshop_Fokusfolien.pptx
@@ -4892,11 +4892,11 @@
       </p:grpSp>
       <p:cxnSp>
         <p:nvCxnSpPr>
-          <p:cNvPr id="990" name="Pfeil Query zu LLM"/>
+          <p:cNvPr id="161" name="Gerade Verbindung Query LLM"/>
           <p:cNvCxnSpPr>
             <a:cxnSpLocks/>
-            <a:stCxn id="18" idx="1"/>
-            <a:endCxn id="93" idx="3"/>
+            <a:stCxn id="13" idx="3"/>
+            <a:endCxn id="41" idx="1"/>
           </p:cNvCxnSpPr>
           <p:nvPr/>
         </p:nvCxnSpPr>
@@ -7260,11 +7260,11 @@
       </p:grpSp>
       <p:cxnSp>
         <p:nvCxnSpPr>
-          <p:cNvPr id="990" name="Pfeil Query zu LLM"/>
+          <p:cNvPr id="161" name="Gerade Verbindung Query LLM"/>
           <p:cNvCxnSpPr>
             <a:cxnSpLocks/>
-            <a:stCxn id="18" idx="1"/>
-            <a:endCxn id="93" idx="3"/>
+            <a:stCxn id="13" idx="3"/>
+            <a:endCxn id="41" idx="1"/>
           </p:cNvCxnSpPr>
           <p:nvPr/>
         </p:nvCxnSpPr>
@@ -10762,6 +10762,49 @@
           </p:txBody>
         </p:sp>
       </p:grpSp>
+      <p:cxnSp>
+        <p:nvCxnSpPr>
+          <p:cNvPr id="161" name="Gerade Verbindung Query LLM"/>
+          <p:cNvCxnSpPr>
+            <a:cxnSpLocks/>
+            <a:stCxn id="13" idx="3"/>
+            <a:endCxn id="41" idx="1"/>
+          </p:cNvCxnSpPr>
+          <p:nvPr/>
+        </p:nvCxnSpPr>
+        <p:spPr>
+          <a:xfrm flipH="1">
+            <a:off x="8460000" y="2407125"/>
+            <a:ext cx="1800000" cy="2540403"/>
+          </a:xfrm>
+          <a:prstGeom prst="straightConnector1">
+            <a:avLst/>
+          </a:prstGeom>
+          <a:ln w="50800">
+            <a:solidFill>
+              <a:schemeClr val="tx1">
+                <a:alpha val="50000"/>
+              </a:schemeClr>
+            </a:solidFill>
+            <a:prstDash val="solid"/>
+            <a:tailEnd type="triangle"/>
+          </a:ln>
+        </p:spPr>
+        <p:style>
+          <a:lnRef idx="1">
+            <a:schemeClr val="accent1"/>
+          </a:lnRef>
+          <a:fillRef idx="0">
+            <a:schemeClr val="accent1"/>
+          </a:fillRef>
+          <a:effectRef idx="0">
+            <a:schemeClr val="accent1"/>
+          </a:effectRef>
+          <a:fontRef idx="minor">
+            <a:schemeClr val="tx1"/>
+          </a:fontRef>
+        </p:style>
+      </p:cxnSp>
       <p:sp>
         <p:nvSpPr>
           <p:cNvPr id="1000" name="Marker Embedding LLM@7740000"/>
@@ -14139,6 +14182,49 @@
           </p:txBody>
         </p:sp>
       </p:grpSp>
+      <p:cxnSp>
+        <p:nvCxnSpPr>
+          <p:cNvPr id="161" name="Gerade Verbindung Query LLM"/>
+          <p:cNvCxnSpPr>
+            <a:cxnSpLocks/>
+            <a:stCxn id="13" idx="3"/>
+            <a:endCxn id="41" idx="1"/>
+          </p:cNvCxnSpPr>
+          <p:nvPr/>
+        </p:nvCxnSpPr>
+        <p:spPr>
+          <a:xfrm flipH="1">
+            <a:off x="8460000" y="2407125"/>
+            <a:ext cx="1800000" cy="2540403"/>
+          </a:xfrm>
+          <a:prstGeom prst="straightConnector1">
+            <a:avLst/>
+          </a:prstGeom>
+          <a:ln w="50800">
+            <a:solidFill>
+              <a:schemeClr val="tx1">
+                <a:alpha val="50000"/>
+              </a:schemeClr>
+            </a:solidFill>
+            <a:prstDash val="solid"/>
+            <a:tailEnd type="triangle"/>
+          </a:ln>
+        </p:spPr>
+        <p:style>
+          <a:lnRef idx="1">
+            <a:schemeClr val="accent1"/>
+          </a:lnRef>
+          <a:fillRef idx="0">
+            <a:schemeClr val="accent1"/>
+          </a:fillRef>
+          <a:effectRef idx="0">
+            <a:schemeClr val="accent1"/>
+          </a:effectRef>
+          <a:fontRef idx="minor">
+            <a:schemeClr val="tx1"/>
+          </a:fontRef>
+        </p:style>
+      </p:cxnSp>
       <p:sp>
         <p:nvSpPr>
           <p:cNvPr id="1000" name="Marker Chunking"/>
@@ -17983,6 +18069,49 @@
           </p:txBody>
         </p:sp>
       </p:grpSp>
+      <p:cxnSp>
+        <p:nvCxnSpPr>
+          <p:cNvPr id="161" name="Gerade Verbindung Query LLM"/>
+          <p:cNvCxnSpPr>
+            <a:cxnSpLocks/>
+            <a:stCxn id="13" idx="3"/>
+            <a:endCxn id="41" idx="1"/>
+          </p:cNvCxnSpPr>
+          <p:nvPr/>
+        </p:nvCxnSpPr>
+        <p:spPr>
+          <a:xfrm flipH="1">
+            <a:off x="8460000" y="2407125"/>
+            <a:ext cx="1800000" cy="2540403"/>
+          </a:xfrm>
+          <a:prstGeom prst="straightConnector1">
+            <a:avLst/>
+          </a:prstGeom>
+          <a:ln w="50800">
+            <a:solidFill>
+              <a:schemeClr val="tx1">
+                <a:alpha val="50000"/>
+              </a:schemeClr>
+            </a:solidFill>
+            <a:prstDash val="solid"/>
+            <a:tailEnd type="triangle"/>
+          </a:ln>
+        </p:spPr>
+        <p:style>
+          <a:lnRef idx="1">
+            <a:schemeClr val="accent1"/>
+          </a:lnRef>
+          <a:fillRef idx="0">
+            <a:schemeClr val="accent1"/>
+          </a:fillRef>
+          <a:effectRef idx="0">
+            <a:schemeClr val="accent1"/>
+          </a:effectRef>
+          <a:fontRef idx="minor">
+            <a:schemeClr val="tx1"/>
+          </a:fontRef>
+        </p:style>
+      </p:cxnSp>
       <p:sp>
         <p:nvSpPr>
           <p:cNvPr id="1000" name="Marker Graph Database"/>

--- a/RAG_Workshop_Fokusfolien.pptx
+++ b/RAG_Workshop_Fokusfolien.pptx
@@ -4895,15 +4895,15 @@
           <p:cNvPr id="161" name="Gerade Verbindung Query LLM"/>
           <p:cNvCxnSpPr>
             <a:cxnSpLocks/>
-            <a:stCxn id="13" idx="3"/>
-            <a:endCxn id="41" idx="1"/>
+            <a:stCxn id="18" idx="2"/>
+            <a:endCxn id="102" idx="0"/>
           </p:cNvCxnSpPr>
           <p:nvPr/>
         </p:nvCxnSpPr>
         <p:spPr>
           <a:xfrm flipH="1">
-            <a:off x="8460000" y="2407125"/>
-            <a:ext cx="1800000" cy="2540403"/>
+            <a:off x="8460000" y="2317125"/>
+            <a:ext cx="1800000" cy="2720403"/>
           </a:xfrm>
           <a:prstGeom prst="straightConnector1">
             <a:avLst/>
@@ -7263,15 +7263,15 @@
           <p:cNvPr id="161" name="Gerade Verbindung Query LLM"/>
           <p:cNvCxnSpPr>
             <a:cxnSpLocks/>
-            <a:stCxn id="13" idx="3"/>
-            <a:endCxn id="41" idx="1"/>
+            <a:stCxn id="18" idx="2"/>
+            <a:endCxn id="102" idx="0"/>
           </p:cNvCxnSpPr>
           <p:nvPr/>
         </p:nvCxnSpPr>
         <p:spPr>
           <a:xfrm flipH="1">
-            <a:off x="8460000" y="2407125"/>
-            <a:ext cx="1800000" cy="2540403"/>
+            <a:off x="8460000" y="2317125"/>
+            <a:ext cx="1800000" cy="2720403"/>
           </a:xfrm>
           <a:prstGeom prst="straightConnector1">
             <a:avLst/>
@@ -10767,15 +10767,15 @@
           <p:cNvPr id="161" name="Gerade Verbindung Query LLM"/>
           <p:cNvCxnSpPr>
             <a:cxnSpLocks/>
-            <a:stCxn id="13" idx="3"/>
-            <a:endCxn id="41" idx="1"/>
+            <a:stCxn id="18" idx="2"/>
+            <a:endCxn id="102" idx="0"/>
           </p:cNvCxnSpPr>
           <p:nvPr/>
         </p:nvCxnSpPr>
         <p:spPr>
           <a:xfrm flipH="1">
-            <a:off x="8460000" y="2407125"/>
-            <a:ext cx="1800000" cy="2540403"/>
+            <a:off x="8460000" y="2317125"/>
+            <a:ext cx="1800000" cy="2720403"/>
           </a:xfrm>
           <a:prstGeom prst="straightConnector1">
             <a:avLst/>
@@ -14187,15 +14187,15 @@
           <p:cNvPr id="161" name="Gerade Verbindung Query LLM"/>
           <p:cNvCxnSpPr>
             <a:cxnSpLocks/>
-            <a:stCxn id="13" idx="3"/>
-            <a:endCxn id="41" idx="1"/>
+            <a:stCxn id="18" idx="2"/>
+            <a:endCxn id="102" idx="0"/>
           </p:cNvCxnSpPr>
           <p:nvPr/>
         </p:nvCxnSpPr>
         <p:spPr>
           <a:xfrm flipH="1">
-            <a:off x="8460000" y="2407125"/>
-            <a:ext cx="1800000" cy="2540403"/>
+            <a:off x="8460000" y="2317125"/>
+            <a:ext cx="1800000" cy="2720403"/>
           </a:xfrm>
           <a:prstGeom prst="straightConnector1">
             <a:avLst/>
@@ -18074,15 +18074,15 @@
           <p:cNvPr id="161" name="Gerade Verbindung Query LLM"/>
           <p:cNvCxnSpPr>
             <a:cxnSpLocks/>
-            <a:stCxn id="13" idx="3"/>
-            <a:endCxn id="41" idx="1"/>
+            <a:stCxn id="18" idx="2"/>
+            <a:endCxn id="102" idx="0"/>
           </p:cNvCxnSpPr>
           <p:nvPr/>
         </p:nvCxnSpPr>
         <p:spPr>
           <a:xfrm flipH="1">
-            <a:off x="8460000" y="2407125"/>
-            <a:ext cx="1800000" cy="2540403"/>
+            <a:off x="8460000" y="2317125"/>
+            <a:ext cx="1800000" cy="2720403"/>
           </a:xfrm>
           <a:prstGeom prst="straightConnector1">
             <a:avLst/>

--- a/RAG_Workshop_Fokusfolien.pptx
+++ b/RAG_Workshop_Fokusfolien.pptx
@@ -4458,10 +4458,10 @@
             <p:nvPr/>
           </p:nvPicPr>
           <p:blipFill>
-            <a:blip>
+            <a:blip r:embed="rId18">
               <a:extLst>
                 <a:ext uri="{96DAC541-7B7A-43D3-8B79-37D633B846F1}">
-                  <asvg:svgBlip xmlns:asvg="http://schemas.microsoft.com/office/drawing/2016/SVG/main" r:embed="rId4"/>
+                  <ns1:svgBlip xmlns:ns1="http://schemas.microsoft.com/office/drawing/2016/SVG/main" r:embed="rId19"/>
                 </a:ext>
               </a:extLst>
             </a:blip>
@@ -4633,10 +4633,10 @@
             <p:nvPr/>
           </p:nvPicPr>
           <p:blipFill>
-            <a:blip>
+            <a:blip r:embed="rId20">
               <a:extLst>
                 <a:ext uri="{96DAC541-7B7A-43D3-8B79-37D633B846F1}">
-                  <asvg:svgBlip xmlns:asvg="http://schemas.microsoft.com/office/drawing/2016/SVG/main" r:embed="rId5"/>
+                  <ns2:svgBlip xmlns:ns2="http://schemas.microsoft.com/office/drawing/2016/SVG/main" r:embed="rId21"/>
                 </a:ext>
               </a:extLst>
             </a:blip>
@@ -4816,10 +4816,10 @@
             <p:nvPr/>
           </p:nvPicPr>
           <p:blipFill>
-            <a:blip>
+            <a:blip r:embed="rId34">
               <a:extLst>
                 <a:ext uri="{96DAC541-7B7A-43D3-8B79-37D633B846F1}">
-                  <asvg:svgBlip xmlns:asvg="http://schemas.microsoft.com/office/drawing/2016/SVG/main" r:embed="rId12"/>
+                  <ns9:svgBlip xmlns:ns9="http://schemas.microsoft.com/office/drawing/2016/SVG/main" r:embed="rId35"/>
                 </a:ext>
               </a:extLst>
             </a:blip>
@@ -5609,10 +5609,10 @@
             <p:nvPr/>
           </p:nvPicPr>
           <p:blipFill>
-            <a:blip>
+            <a:blip r:embed="rId16">
               <a:extLst>
                 <a:ext uri="{96DAC541-7B7A-43D3-8B79-37D633B846F1}">
-                  <asvg:svgBlip xmlns:asvg="http://schemas.microsoft.com/office/drawing/2016/SVG/main" r:embed="rId3"/>
+                  <ns0:svgBlip xmlns:ns0="http://schemas.microsoft.com/office/drawing/2016/SVG/main" r:embed="rId17"/>
                 </a:ext>
               </a:extLst>
             </a:blip>
@@ -5738,10 +5738,10 @@
             <p:nvPr/>
           </p:nvPicPr>
           <p:blipFill>
-            <a:blip>
+            <a:blip r:embed="rId18">
               <a:extLst>
                 <a:ext uri="{96DAC541-7B7A-43D3-8B79-37D633B846F1}">
-                  <asvg:svgBlip xmlns:asvg="http://schemas.microsoft.com/office/drawing/2016/SVG/main" r:embed="rId4"/>
+                  <ns1:svgBlip xmlns:ns1="http://schemas.microsoft.com/office/drawing/2016/SVG/main" r:embed="rId19"/>
                 </a:ext>
               </a:extLst>
             </a:blip>
@@ -5913,10 +5913,10 @@
             <p:nvPr/>
           </p:nvPicPr>
           <p:blipFill>
-            <a:blip>
+            <a:blip r:embed="rId20">
               <a:extLst>
                 <a:ext uri="{96DAC541-7B7A-43D3-8B79-37D633B846F1}">
-                  <asvg:svgBlip xmlns:asvg="http://schemas.microsoft.com/office/drawing/2016/SVG/main" r:embed="rId5"/>
+                  <ns2:svgBlip xmlns:ns2="http://schemas.microsoft.com/office/drawing/2016/SVG/main" r:embed="rId21"/>
                 </a:ext>
               </a:extLst>
             </a:blip>
@@ -6090,10 +6090,10 @@
             <p:nvPr/>
           </p:nvPicPr>
           <p:blipFill>
-            <a:blip>
+            <a:blip r:embed="rId22">
               <a:extLst>
                 <a:ext uri="{96DAC541-7B7A-43D3-8B79-37D633B846F1}">
-                  <asvg:svgBlip xmlns:asvg="http://schemas.microsoft.com/office/drawing/2016/SVG/main" r:embed="rId6"/>
+                  <ns3:svgBlip xmlns:ns3="http://schemas.microsoft.com/office/drawing/2016/SVG/main" r:embed="rId23"/>
                 </a:ext>
               </a:extLst>
             </a:blip>
@@ -6329,10 +6329,10 @@
             <p:nvPr/>
           </p:nvPicPr>
           <p:blipFill>
-            <a:blip>
+            <a:blip r:embed="rId24">
               <a:extLst>
                 <a:ext uri="{96DAC541-7B7A-43D3-8B79-37D633B846F1}">
-                  <asvg:svgBlip xmlns:asvg="http://schemas.microsoft.com/office/drawing/2016/SVG/main" r:embed="rId7"/>
+                  <ns4:svgBlip xmlns:ns4="http://schemas.microsoft.com/office/drawing/2016/SVG/main" r:embed="rId25"/>
                 </a:ext>
               </a:extLst>
             </a:blip>
@@ -6456,10 +6456,10 @@
             <p:nvPr/>
           </p:nvPicPr>
           <p:blipFill>
-            <a:blip>
+            <a:blip r:embed="rId26">
               <a:extLst>
                 <a:ext uri="{96DAC541-7B7A-43D3-8B79-37D633B846F1}">
-                  <asvg:svgBlip xmlns:asvg="http://schemas.microsoft.com/office/drawing/2016/SVG/main" r:embed="rId8"/>
+                  <ns5:svgBlip xmlns:ns5="http://schemas.microsoft.com/office/drawing/2016/SVG/main" r:embed="rId27"/>
                 </a:ext>
               </a:extLst>
             </a:blip>
@@ -6635,10 +6635,10 @@
             <p:nvPr/>
           </p:nvPicPr>
           <p:blipFill>
-            <a:blip>
+            <a:blip r:embed="rId28">
               <a:extLst>
                 <a:ext uri="{96DAC541-7B7A-43D3-8B79-37D633B846F1}">
-                  <asvg:svgBlip xmlns:asvg="http://schemas.microsoft.com/office/drawing/2016/SVG/main" r:embed="rId9"/>
+                  <ns6:svgBlip xmlns:ns6="http://schemas.microsoft.com/office/drawing/2016/SVG/main" r:embed="rId29"/>
                 </a:ext>
               </a:extLst>
             </a:blip>
@@ -6824,10 +6824,10 @@
             <p:nvPr/>
           </p:nvPicPr>
           <p:blipFill>
-            <a:blip>
+            <a:blip r:embed="rId34">
               <a:extLst>
                 <a:ext uri="{96DAC541-7B7A-43D3-8B79-37D633B846F1}">
-                  <asvg:svgBlip xmlns:asvg="http://schemas.microsoft.com/office/drawing/2016/SVG/main" r:embed="rId12"/>
+                  <ns9:svgBlip xmlns:ns9="http://schemas.microsoft.com/office/drawing/2016/SVG/main" r:embed="rId35"/>
                 </a:ext>
               </a:extLst>
             </a:blip>
@@ -7007,10 +7007,10 @@
             <p:nvPr/>
           </p:nvPicPr>
           <p:blipFill>
-            <a:blip>
+            <a:blip r:embed="rId32">
               <a:extLst>
                 <a:ext uri="{96DAC541-7B7A-43D3-8B79-37D633B846F1}">
-                  <asvg:svgBlip xmlns:asvg="http://schemas.microsoft.com/office/drawing/2016/SVG/main" r:embed="rId11"/>
+                  <ns10:svgBlip xmlns:ns10="http://schemas.microsoft.com/office/drawing/2016/SVG/main" r:embed="rId33"/>
                 </a:ext>
               </a:extLst>
             </a:blip>
@@ -7186,10 +7186,10 @@
             <p:nvPr/>
           </p:nvPicPr>
           <p:blipFill>
-            <a:blip>
+            <a:blip r:embed="rId36">
               <a:extLst>
                 <a:ext uri="{96DAC541-7B7A-43D3-8B79-37D633B846F1}">
-                  <asvg:svgBlip xmlns:asvg="http://schemas.microsoft.com/office/drawing/2016/SVG/main" r:embed="rId7"/>
+                  <ns11:svgBlip xmlns:ns11="http://schemas.microsoft.com/office/drawing/2016/SVG/main" r:embed="rId37"/>
                 </a:ext>
               </a:extLst>
             </a:blip>
@@ -8383,10 +8383,10 @@
             <p:nvPr/>
           </p:nvPicPr>
           <p:blipFill>
-            <a:blip>
+            <a:blip r:embed="rId16">
               <a:extLst>
                 <a:ext uri="{96DAC541-7B7A-43D3-8B79-37D633B846F1}">
-                  <asvg:svgBlip xmlns:asvg="http://schemas.microsoft.com/office/drawing/2016/SVG/main" r:embed="rId3"/>
+                  <ns0:svgBlip xmlns:ns0="http://schemas.microsoft.com/office/drawing/2016/SVG/main" r:embed="rId17"/>
                 </a:ext>
               </a:extLst>
             </a:blip>
@@ -8512,10 +8512,10 @@
             <p:nvPr/>
           </p:nvPicPr>
           <p:blipFill>
-            <a:blip>
+            <a:blip r:embed="rId18">
               <a:extLst>
                 <a:ext uri="{96DAC541-7B7A-43D3-8B79-37D633B846F1}">
-                  <asvg:svgBlip xmlns:asvg="http://schemas.microsoft.com/office/drawing/2016/SVG/main" r:embed="rId4"/>
+                  <ns1:svgBlip xmlns:ns1="http://schemas.microsoft.com/office/drawing/2016/SVG/main" r:embed="rId19"/>
                 </a:ext>
               </a:extLst>
             </a:blip>
@@ -8687,10 +8687,10 @@
             <p:nvPr/>
           </p:nvPicPr>
           <p:blipFill>
-            <a:blip>
+            <a:blip r:embed="rId20">
               <a:extLst>
                 <a:ext uri="{96DAC541-7B7A-43D3-8B79-37D633B846F1}">
-                  <asvg:svgBlip xmlns:asvg="http://schemas.microsoft.com/office/drawing/2016/SVG/main" r:embed="rId5"/>
+                  <ns2:svgBlip xmlns:ns2="http://schemas.microsoft.com/office/drawing/2016/SVG/main" r:embed="rId21"/>
                 </a:ext>
               </a:extLst>
             </a:blip>
@@ -8864,10 +8864,10 @@
             <p:nvPr/>
           </p:nvPicPr>
           <p:blipFill>
-            <a:blip>
+            <a:blip r:embed="rId22">
               <a:extLst>
                 <a:ext uri="{96DAC541-7B7A-43D3-8B79-37D633B846F1}">
-                  <asvg:svgBlip xmlns:asvg="http://schemas.microsoft.com/office/drawing/2016/SVG/main" r:embed="rId6"/>
+                  <ns3:svgBlip xmlns:ns3="http://schemas.microsoft.com/office/drawing/2016/SVG/main" r:embed="rId23"/>
                 </a:ext>
               </a:extLst>
             </a:blip>
@@ -9103,10 +9103,10 @@
             <p:nvPr/>
           </p:nvPicPr>
           <p:blipFill>
-            <a:blip>
+            <a:blip r:embed="rId24">
               <a:extLst>
                 <a:ext uri="{96DAC541-7B7A-43D3-8B79-37D633B846F1}">
-                  <asvg:svgBlip xmlns:asvg="http://schemas.microsoft.com/office/drawing/2016/SVG/main" r:embed="rId7"/>
+                  <ns4:svgBlip xmlns:ns4="http://schemas.microsoft.com/office/drawing/2016/SVG/main" r:embed="rId25"/>
                 </a:ext>
               </a:extLst>
             </a:blip>
@@ -9230,10 +9230,10 @@
             <p:nvPr/>
           </p:nvPicPr>
           <p:blipFill>
-            <a:blip>
+            <a:blip r:embed="rId26">
               <a:extLst>
                 <a:ext uri="{96DAC541-7B7A-43D3-8B79-37D633B846F1}">
-                  <asvg:svgBlip xmlns:asvg="http://schemas.microsoft.com/office/drawing/2016/SVG/main" r:embed="rId8"/>
+                  <ns5:svgBlip xmlns:ns5="http://schemas.microsoft.com/office/drawing/2016/SVG/main" r:embed="rId27"/>
                 </a:ext>
               </a:extLst>
             </a:blip>
@@ -9409,10 +9409,10 @@
             <p:nvPr/>
           </p:nvPicPr>
           <p:blipFill>
-            <a:blip>
+            <a:blip r:embed="rId28">
               <a:extLst>
                 <a:ext uri="{96DAC541-7B7A-43D3-8B79-37D633B846F1}">
-                  <asvg:svgBlip xmlns:asvg="http://schemas.microsoft.com/office/drawing/2016/SVG/main" r:embed="rId9"/>
+                  <ns6:svgBlip xmlns:ns6="http://schemas.microsoft.com/office/drawing/2016/SVG/main" r:embed="rId29"/>
                 </a:ext>
               </a:extLst>
             </a:blip>
@@ -9588,10 +9588,10 @@
             <p:nvPr/>
           </p:nvPicPr>
           <p:blipFill>
-            <a:blip>
+            <a:blip r:embed="rId30">
               <a:extLst>
                 <a:ext uri="{96DAC541-7B7A-43D3-8B79-37D633B846F1}">
-                  <asvg:svgBlip xmlns:asvg="http://schemas.microsoft.com/office/drawing/2016/SVG/main" r:embed="rId10"/>
+                  <ns7:svgBlip xmlns:ns7="http://schemas.microsoft.com/office/drawing/2016/SVG/main" r:embed="rId31"/>
                 </a:ext>
               </a:extLst>
             </a:blip>
@@ -9769,10 +9769,10 @@
             <p:nvPr/>
           </p:nvPicPr>
           <p:blipFill>
-            <a:blip>
+            <a:blip r:embed="rId32">
               <a:extLst>
                 <a:ext uri="{96DAC541-7B7A-43D3-8B79-37D633B846F1}">
-                  <asvg:svgBlip xmlns:asvg="http://schemas.microsoft.com/office/drawing/2016/SVG/main" r:embed="rId11"/>
+                  <ns8:svgBlip xmlns:ns8="http://schemas.microsoft.com/office/drawing/2016/SVG/main" r:embed="rId33"/>
                 </a:ext>
               </a:extLst>
             </a:blip>
@@ -9958,10 +9958,10 @@
             <p:nvPr/>
           </p:nvPicPr>
           <p:blipFill>
-            <a:blip>
+            <a:blip r:embed="rId34">
               <a:extLst>
                 <a:ext uri="{96DAC541-7B7A-43D3-8B79-37D633B846F1}">
-                  <asvg:svgBlip xmlns:asvg="http://schemas.microsoft.com/office/drawing/2016/SVG/main" r:embed="rId12"/>
+                  <ns9:svgBlip xmlns:ns9="http://schemas.microsoft.com/office/drawing/2016/SVG/main" r:embed="rId35"/>
                 </a:ext>
               </a:extLst>
             </a:blip>
@@ -10141,10 +10141,10 @@
             <p:nvPr/>
           </p:nvPicPr>
           <p:blipFill>
-            <a:blip>
+            <a:blip r:embed="rId32">
               <a:extLst>
                 <a:ext uri="{96DAC541-7B7A-43D3-8B79-37D633B846F1}">
-                  <asvg:svgBlip xmlns:asvg="http://schemas.microsoft.com/office/drawing/2016/SVG/main" r:embed="rId11"/>
+                  <ns10:svgBlip xmlns:ns10="http://schemas.microsoft.com/office/drawing/2016/SVG/main" r:embed="rId33"/>
                 </a:ext>
               </a:extLst>
             </a:blip>
@@ -10320,10 +10320,10 @@
             <p:nvPr/>
           </p:nvPicPr>
           <p:blipFill>
-            <a:blip>
+            <a:blip r:embed="rId36">
               <a:extLst>
                 <a:ext uri="{96DAC541-7B7A-43D3-8B79-37D633B846F1}">
-                  <asvg:svgBlip xmlns:asvg="http://schemas.microsoft.com/office/drawing/2016/SVG/main" r:embed="rId7"/>
+                  <ns11:svgBlip xmlns:ns11="http://schemas.microsoft.com/office/drawing/2016/SVG/main" r:embed="rId37"/>
                 </a:ext>
               </a:extLst>
             </a:blip>
@@ -10501,10 +10501,10 @@
             <p:nvPr/>
           </p:nvPicPr>
           <p:blipFill>
-            <a:blip>
+            <a:blip r:embed="rId26">
               <a:extLst>
                 <a:ext uri="{96DAC541-7B7A-43D3-8B79-37D633B846F1}">
-                  <asvg:svgBlip xmlns:asvg="http://schemas.microsoft.com/office/drawing/2016/SVG/main" r:embed="rId8"/>
+                  <ns12:svgBlip xmlns:ns12="http://schemas.microsoft.com/office/drawing/2016/SVG/main" r:embed="rId27"/>
                 </a:ext>
               </a:extLst>
             </a:blip>
@@ -10688,10 +10688,10 @@
             <p:nvPr/>
           </p:nvPicPr>
           <p:blipFill>
-            <a:blip>
+            <a:blip r:embed="rId42">
               <a:extLst>
                 <a:ext uri="{96DAC541-7B7A-43D3-8B79-37D633B846F1}">
-                  <asvg:svgBlip xmlns:asvg="http://schemas.microsoft.com/office/drawing/2016/SVG/main" r:embed="rId15"/>
+                  <ns15:svgBlip xmlns:ns15="http://schemas.microsoft.com/office/drawing/2016/SVG/main" r:embed="rId43"/>
                 </a:ext>
               </a:extLst>
             </a:blip>
@@ -11803,10 +11803,10 @@
             <p:nvPr/>
           </p:nvPicPr>
           <p:blipFill>
-            <a:blip>
+            <a:blip r:embed="rId16">
               <a:extLst>
                 <a:ext uri="{96DAC541-7B7A-43D3-8B79-37D633B846F1}">
-                  <asvg:svgBlip xmlns:asvg="http://schemas.microsoft.com/office/drawing/2016/SVG/main" r:embed="rId3"/>
+                  <ns0:svgBlip xmlns:ns0="http://schemas.microsoft.com/office/drawing/2016/SVG/main" r:embed="rId17"/>
                 </a:ext>
               </a:extLst>
             </a:blip>
@@ -11932,10 +11932,10 @@
             <p:nvPr/>
           </p:nvPicPr>
           <p:blipFill>
-            <a:blip>
+            <a:blip r:embed="rId18">
               <a:extLst>
                 <a:ext uri="{96DAC541-7B7A-43D3-8B79-37D633B846F1}">
-                  <asvg:svgBlip xmlns:asvg="http://schemas.microsoft.com/office/drawing/2016/SVG/main" r:embed="rId4"/>
+                  <ns1:svgBlip xmlns:ns1="http://schemas.microsoft.com/office/drawing/2016/SVG/main" r:embed="rId19"/>
                 </a:ext>
               </a:extLst>
             </a:blip>
@@ -12107,10 +12107,10 @@
             <p:nvPr/>
           </p:nvPicPr>
           <p:blipFill>
-            <a:blip>
+            <a:blip r:embed="rId20">
               <a:extLst>
                 <a:ext uri="{96DAC541-7B7A-43D3-8B79-37D633B846F1}">
-                  <asvg:svgBlip xmlns:asvg="http://schemas.microsoft.com/office/drawing/2016/SVG/main" r:embed="rId5"/>
+                  <ns2:svgBlip xmlns:ns2="http://schemas.microsoft.com/office/drawing/2016/SVG/main" r:embed="rId21"/>
                 </a:ext>
               </a:extLst>
             </a:blip>
@@ -12284,10 +12284,10 @@
             <p:nvPr/>
           </p:nvPicPr>
           <p:blipFill>
-            <a:blip>
+            <a:blip r:embed="rId22">
               <a:extLst>
                 <a:ext uri="{96DAC541-7B7A-43D3-8B79-37D633B846F1}">
-                  <asvg:svgBlip xmlns:asvg="http://schemas.microsoft.com/office/drawing/2016/SVG/main" r:embed="rId6"/>
+                  <ns3:svgBlip xmlns:ns3="http://schemas.microsoft.com/office/drawing/2016/SVG/main" r:embed="rId23"/>
                 </a:ext>
               </a:extLst>
             </a:blip>
@@ -12523,10 +12523,10 @@
             <p:nvPr/>
           </p:nvPicPr>
           <p:blipFill>
-            <a:blip>
+            <a:blip r:embed="rId24">
               <a:extLst>
                 <a:ext uri="{96DAC541-7B7A-43D3-8B79-37D633B846F1}">
-                  <asvg:svgBlip xmlns:asvg="http://schemas.microsoft.com/office/drawing/2016/SVG/main" r:embed="rId7"/>
+                  <ns4:svgBlip xmlns:ns4="http://schemas.microsoft.com/office/drawing/2016/SVG/main" r:embed="rId25"/>
                 </a:ext>
               </a:extLst>
             </a:blip>
@@ -12650,10 +12650,10 @@
             <p:nvPr/>
           </p:nvPicPr>
           <p:blipFill>
-            <a:blip>
+            <a:blip r:embed="rId26">
               <a:extLst>
                 <a:ext uri="{96DAC541-7B7A-43D3-8B79-37D633B846F1}">
-                  <asvg:svgBlip xmlns:asvg="http://schemas.microsoft.com/office/drawing/2016/SVG/main" r:embed="rId8"/>
+                  <ns5:svgBlip xmlns:ns5="http://schemas.microsoft.com/office/drawing/2016/SVG/main" r:embed="rId27"/>
                 </a:ext>
               </a:extLst>
             </a:blip>
@@ -12829,10 +12829,10 @@
             <p:nvPr/>
           </p:nvPicPr>
           <p:blipFill>
-            <a:blip>
+            <a:blip r:embed="rId28">
               <a:extLst>
                 <a:ext uri="{96DAC541-7B7A-43D3-8B79-37D633B846F1}">
-                  <asvg:svgBlip xmlns:asvg="http://schemas.microsoft.com/office/drawing/2016/SVG/main" r:embed="rId9"/>
+                  <ns6:svgBlip xmlns:ns6="http://schemas.microsoft.com/office/drawing/2016/SVG/main" r:embed="rId29"/>
                 </a:ext>
               </a:extLst>
             </a:blip>
@@ -13008,10 +13008,10 @@
             <p:nvPr/>
           </p:nvPicPr>
           <p:blipFill>
-            <a:blip>
+            <a:blip r:embed="rId30">
               <a:extLst>
                 <a:ext uri="{96DAC541-7B7A-43D3-8B79-37D633B846F1}">
-                  <asvg:svgBlip xmlns:asvg="http://schemas.microsoft.com/office/drawing/2016/SVG/main" r:embed="rId10"/>
+                  <ns7:svgBlip xmlns:ns7="http://schemas.microsoft.com/office/drawing/2016/SVG/main" r:embed="rId31"/>
                 </a:ext>
               </a:extLst>
             </a:blip>
@@ -13189,10 +13189,10 @@
             <p:nvPr/>
           </p:nvPicPr>
           <p:blipFill>
-            <a:blip>
+            <a:blip r:embed="rId32">
               <a:extLst>
                 <a:ext uri="{96DAC541-7B7A-43D3-8B79-37D633B846F1}">
-                  <asvg:svgBlip xmlns:asvg="http://schemas.microsoft.com/office/drawing/2016/SVG/main" r:embed="rId11"/>
+                  <ns8:svgBlip xmlns:ns8="http://schemas.microsoft.com/office/drawing/2016/SVG/main" r:embed="rId33"/>
                 </a:ext>
               </a:extLst>
             </a:blip>
@@ -13378,10 +13378,10 @@
             <p:nvPr/>
           </p:nvPicPr>
           <p:blipFill>
-            <a:blip>
+            <a:blip r:embed="rId34">
               <a:extLst>
                 <a:ext uri="{96DAC541-7B7A-43D3-8B79-37D633B846F1}">
-                  <asvg:svgBlip xmlns:asvg="http://schemas.microsoft.com/office/drawing/2016/SVG/main" r:embed="rId12"/>
+                  <ns9:svgBlip xmlns:ns9="http://schemas.microsoft.com/office/drawing/2016/SVG/main" r:embed="rId35"/>
                 </a:ext>
               </a:extLst>
             </a:blip>
@@ -13561,10 +13561,10 @@
             <p:nvPr/>
           </p:nvPicPr>
           <p:blipFill>
-            <a:blip>
+            <a:blip r:embed="rId32">
               <a:extLst>
                 <a:ext uri="{96DAC541-7B7A-43D3-8B79-37D633B846F1}">
-                  <asvg:svgBlip xmlns:asvg="http://schemas.microsoft.com/office/drawing/2016/SVG/main" r:embed="rId11"/>
+                  <ns10:svgBlip xmlns:ns10="http://schemas.microsoft.com/office/drawing/2016/SVG/main" r:embed="rId33"/>
                 </a:ext>
               </a:extLst>
             </a:blip>
@@ -13740,10 +13740,10 @@
             <p:nvPr/>
           </p:nvPicPr>
           <p:blipFill>
-            <a:blip>
+            <a:blip r:embed="rId36">
               <a:extLst>
                 <a:ext uri="{96DAC541-7B7A-43D3-8B79-37D633B846F1}">
-                  <asvg:svgBlip xmlns:asvg="http://schemas.microsoft.com/office/drawing/2016/SVG/main" r:embed="rId7"/>
+                  <ns11:svgBlip xmlns:ns11="http://schemas.microsoft.com/office/drawing/2016/SVG/main" r:embed="rId37"/>
                 </a:ext>
               </a:extLst>
             </a:blip>
@@ -13921,10 +13921,10 @@
             <p:nvPr/>
           </p:nvPicPr>
           <p:blipFill>
-            <a:blip>
+            <a:blip r:embed="rId26">
               <a:extLst>
                 <a:ext uri="{96DAC541-7B7A-43D3-8B79-37D633B846F1}">
-                  <asvg:svgBlip xmlns:asvg="http://schemas.microsoft.com/office/drawing/2016/SVG/main" r:embed="rId8"/>
+                  <ns12:svgBlip xmlns:ns12="http://schemas.microsoft.com/office/drawing/2016/SVG/main" r:embed="rId27"/>
                 </a:ext>
               </a:extLst>
             </a:blip>
@@ -14108,10 +14108,10 @@
             <p:nvPr/>
           </p:nvPicPr>
           <p:blipFill>
-            <a:blip>
+            <a:blip r:embed="rId42">
               <a:extLst>
                 <a:ext uri="{96DAC541-7B7A-43D3-8B79-37D633B846F1}">
-                  <asvg:svgBlip xmlns:asvg="http://schemas.microsoft.com/office/drawing/2016/SVG/main" r:embed="rId15"/>
+                  <ns15:svgBlip xmlns:ns15="http://schemas.microsoft.com/office/drawing/2016/SVG/main" r:embed="rId43"/>
                 </a:ext>
               </a:extLst>
             </a:blip>
@@ -15314,10 +15314,10 @@
             <p:nvPr/>
           </p:nvPicPr>
           <p:blipFill>
-            <a:blip>
+            <a:blip r:embed="rId16">
               <a:extLst>
                 <a:ext uri="{96DAC541-7B7A-43D3-8B79-37D633B846F1}">
-                  <asvg:svgBlip xmlns:asvg="http://schemas.microsoft.com/office/drawing/2016/SVG/main" r:embed="rId3"/>
+                  <ns0:svgBlip xmlns:ns0="http://schemas.microsoft.com/office/drawing/2016/SVG/main" r:embed="rId17"/>
                 </a:ext>
               </a:extLst>
             </a:blip>
@@ -15443,10 +15443,10 @@
             <p:nvPr/>
           </p:nvPicPr>
           <p:blipFill>
-            <a:blip>
+            <a:blip r:embed="rId18">
               <a:extLst>
                 <a:ext uri="{96DAC541-7B7A-43D3-8B79-37D633B846F1}">
-                  <asvg:svgBlip xmlns:asvg="http://schemas.microsoft.com/office/drawing/2016/SVG/main" r:embed="rId4"/>
+                  <ns1:svgBlip xmlns:ns1="http://schemas.microsoft.com/office/drawing/2016/SVG/main" r:embed="rId19"/>
                 </a:ext>
               </a:extLst>
             </a:blip>
@@ -15618,10 +15618,10 @@
             <p:nvPr/>
           </p:nvPicPr>
           <p:blipFill>
-            <a:blip>
+            <a:blip r:embed="rId20">
               <a:extLst>
                 <a:ext uri="{96DAC541-7B7A-43D3-8B79-37D633B846F1}">
-                  <asvg:svgBlip xmlns:asvg="http://schemas.microsoft.com/office/drawing/2016/SVG/main" r:embed="rId5"/>
+                  <ns2:svgBlip xmlns:ns2="http://schemas.microsoft.com/office/drawing/2016/SVG/main" r:embed="rId21"/>
                 </a:ext>
               </a:extLst>
             </a:blip>
@@ -15795,10 +15795,10 @@
             <p:nvPr/>
           </p:nvPicPr>
           <p:blipFill>
-            <a:blip>
+            <a:blip r:embed="rId22">
               <a:extLst>
                 <a:ext uri="{96DAC541-7B7A-43D3-8B79-37D633B846F1}">
-                  <asvg:svgBlip xmlns:asvg="http://schemas.microsoft.com/office/drawing/2016/SVG/main" r:embed="rId6"/>
+                  <ns3:svgBlip xmlns:ns3="http://schemas.microsoft.com/office/drawing/2016/SVG/main" r:embed="rId23"/>
                 </a:ext>
               </a:extLst>
             </a:blip>
@@ -16034,10 +16034,10 @@
             <p:nvPr/>
           </p:nvPicPr>
           <p:blipFill>
-            <a:blip>
+            <a:blip r:embed="rId24">
               <a:extLst>
                 <a:ext uri="{96DAC541-7B7A-43D3-8B79-37D633B846F1}">
-                  <asvg:svgBlip xmlns:asvg="http://schemas.microsoft.com/office/drawing/2016/SVG/main" r:embed="rId7"/>
+                  <ns4:svgBlip xmlns:ns4="http://schemas.microsoft.com/office/drawing/2016/SVG/main" r:embed="rId25"/>
                 </a:ext>
               </a:extLst>
             </a:blip>
@@ -16161,10 +16161,10 @@
             <p:nvPr/>
           </p:nvPicPr>
           <p:blipFill>
-            <a:blip>
+            <a:blip r:embed="rId26">
               <a:extLst>
                 <a:ext uri="{96DAC541-7B7A-43D3-8B79-37D633B846F1}">
-                  <asvg:svgBlip xmlns:asvg="http://schemas.microsoft.com/office/drawing/2016/SVG/main" r:embed="rId8"/>
+                  <ns5:svgBlip xmlns:ns5="http://schemas.microsoft.com/office/drawing/2016/SVG/main" r:embed="rId27"/>
                 </a:ext>
               </a:extLst>
             </a:blip>
@@ -16340,10 +16340,10 @@
             <p:nvPr/>
           </p:nvPicPr>
           <p:blipFill>
-            <a:blip>
+            <a:blip r:embed="rId28">
               <a:extLst>
                 <a:ext uri="{96DAC541-7B7A-43D3-8B79-37D633B846F1}">
-                  <asvg:svgBlip xmlns:asvg="http://schemas.microsoft.com/office/drawing/2016/SVG/main" r:embed="rId9"/>
+                  <ns6:svgBlip xmlns:ns6="http://schemas.microsoft.com/office/drawing/2016/SVG/main" r:embed="rId29"/>
                 </a:ext>
               </a:extLst>
             </a:blip>
@@ -16519,10 +16519,10 @@
             <p:nvPr/>
           </p:nvPicPr>
           <p:blipFill>
-            <a:blip>
+            <a:blip r:embed="rId30">
               <a:extLst>
                 <a:ext uri="{96DAC541-7B7A-43D3-8B79-37D633B846F1}">
-                  <asvg:svgBlip xmlns:asvg="http://schemas.microsoft.com/office/drawing/2016/SVG/main" r:embed="rId10"/>
+                  <ns7:svgBlip xmlns:ns7="http://schemas.microsoft.com/office/drawing/2016/SVG/main" r:embed="rId31"/>
                 </a:ext>
               </a:extLst>
             </a:blip>
@@ -16700,10 +16700,10 @@
             <p:nvPr/>
           </p:nvPicPr>
           <p:blipFill>
-            <a:blip>
+            <a:blip r:embed="rId32">
               <a:extLst>
                 <a:ext uri="{96DAC541-7B7A-43D3-8B79-37D633B846F1}">
-                  <asvg:svgBlip xmlns:asvg="http://schemas.microsoft.com/office/drawing/2016/SVG/main" r:embed="rId11"/>
+                  <ns8:svgBlip xmlns:ns8="http://schemas.microsoft.com/office/drawing/2016/SVG/main" r:embed="rId33"/>
                 </a:ext>
               </a:extLst>
             </a:blip>
@@ -16889,10 +16889,10 @@
             <p:nvPr/>
           </p:nvPicPr>
           <p:blipFill>
-            <a:blip>
+            <a:blip r:embed="rId34">
               <a:extLst>
                 <a:ext uri="{96DAC541-7B7A-43D3-8B79-37D633B846F1}">
-                  <asvg:svgBlip xmlns:asvg="http://schemas.microsoft.com/office/drawing/2016/SVG/main" r:embed="rId12"/>
+                  <ns9:svgBlip xmlns:ns9="http://schemas.microsoft.com/office/drawing/2016/SVG/main" r:embed="rId35"/>
                 </a:ext>
               </a:extLst>
             </a:blip>
@@ -17072,10 +17072,10 @@
             <p:nvPr/>
           </p:nvPicPr>
           <p:blipFill>
-            <a:blip>
+            <a:blip r:embed="rId32">
               <a:extLst>
                 <a:ext uri="{96DAC541-7B7A-43D3-8B79-37D633B846F1}">
-                  <asvg:svgBlip xmlns:asvg="http://schemas.microsoft.com/office/drawing/2016/SVG/main" r:embed="rId11"/>
+                  <ns10:svgBlip xmlns:ns10="http://schemas.microsoft.com/office/drawing/2016/SVG/main" r:embed="rId33"/>
                 </a:ext>
               </a:extLst>
             </a:blip>
@@ -17251,10 +17251,10 @@
             <p:nvPr/>
           </p:nvPicPr>
           <p:blipFill>
-            <a:blip>
+            <a:blip r:embed="rId36">
               <a:extLst>
                 <a:ext uri="{96DAC541-7B7A-43D3-8B79-37D633B846F1}">
-                  <asvg:svgBlip xmlns:asvg="http://schemas.microsoft.com/office/drawing/2016/SVG/main" r:embed="rId7"/>
+                  <ns11:svgBlip xmlns:ns11="http://schemas.microsoft.com/office/drawing/2016/SVG/main" r:embed="rId37"/>
                 </a:ext>
               </a:extLst>
             </a:blip>
@@ -17432,10 +17432,10 @@
             <p:nvPr/>
           </p:nvPicPr>
           <p:blipFill>
-            <a:blip>
+            <a:blip r:embed="rId26">
               <a:extLst>
                 <a:ext uri="{96DAC541-7B7A-43D3-8B79-37D633B846F1}">
-                  <asvg:svgBlip xmlns:asvg="http://schemas.microsoft.com/office/drawing/2016/SVG/main" r:embed="rId8"/>
+                  <ns12:svgBlip xmlns:ns12="http://schemas.microsoft.com/office/drawing/2016/SVG/main" r:embed="rId27"/>
                 </a:ext>
               </a:extLst>
             </a:blip>
@@ -17619,10 +17619,10 @@
             <p:nvPr/>
           </p:nvPicPr>
           <p:blipFill>
-            <a:blip>
+            <a:blip r:embed="rId38">
               <a:extLst>
                 <a:ext uri="{96DAC541-7B7A-43D3-8B79-37D633B846F1}">
-                  <asvg:svgBlip xmlns:asvg="http://schemas.microsoft.com/office/drawing/2016/SVG/main" r:embed="rId13"/>
+                  <ns13:svgBlip xmlns:ns13="http://schemas.microsoft.com/office/drawing/2016/SVG/main" r:embed="rId39"/>
                 </a:ext>
               </a:extLst>
             </a:blip>
@@ -17806,10 +17806,10 @@
             <p:nvPr/>
           </p:nvPicPr>
           <p:blipFill>
-            <a:blip>
+            <a:blip r:embed="rId40">
               <a:extLst>
                 <a:ext uri="{96DAC541-7B7A-43D3-8B79-37D633B846F1}">
-                  <asvg:svgBlip xmlns:asvg="http://schemas.microsoft.com/office/drawing/2016/SVG/main" r:embed="rId14"/>
+                  <ns14:svgBlip xmlns:ns14="http://schemas.microsoft.com/office/drawing/2016/SVG/main" r:embed="rId41"/>
                 </a:ext>
               </a:extLst>
             </a:blip>
@@ -17995,10 +17995,10 @@
             <p:nvPr/>
           </p:nvPicPr>
           <p:blipFill>
-            <a:blip>
+            <a:blip r:embed="rId42">
               <a:extLst>
                 <a:ext uri="{96DAC541-7B7A-43D3-8B79-37D633B846F1}">
-                  <asvg:svgBlip xmlns:asvg="http://schemas.microsoft.com/office/drawing/2016/SVG/main" r:embed="rId15"/>
+                  <ns15:svgBlip xmlns:ns15="http://schemas.microsoft.com/office/drawing/2016/SVG/main" r:embed="rId43"/>
                 </a:ext>
               </a:extLst>
             </a:blip>

--- a/RAG_Workshop_Fokusfolien.pptx
+++ b/RAG_Workshop_Fokusfolien.pptx
@@ -4461,7 +4461,7 @@
             <a:blip r:embed="rId18">
               <a:extLst>
                 <a:ext uri="{96DAC541-7B7A-43D3-8B79-37D633B846F1}">
-                  <ns1:svgBlip xmlns:ns1="http://schemas.microsoft.com/office/drawing/2016/SVG/main" r:embed="rId19"/>
+                  <ns1:svgBlip xmlns:ns1="http://schemas.microsoft.com/office/drawing/2016/SVG/main" r:embed="rId14"/>
                 </a:ext>
               </a:extLst>
             </a:blip>
@@ -4636,7 +4636,7 @@
             <a:blip r:embed="rId20">
               <a:extLst>
                 <a:ext uri="{96DAC541-7B7A-43D3-8B79-37D633B846F1}">
-                  <ns2:svgBlip xmlns:ns2="http://schemas.microsoft.com/office/drawing/2016/SVG/main" r:embed="rId21"/>
+                  <ns2:svgBlip xmlns:ns2="http://schemas.microsoft.com/office/drawing/2016/SVG/main" r:embed="rId13"/>
                 </a:ext>
               </a:extLst>
             </a:blip>
@@ -4819,7 +4819,7 @@
             <a:blip r:embed="rId34">
               <a:extLst>
                 <a:ext uri="{96DAC541-7B7A-43D3-8B79-37D633B846F1}">
-                  <ns9:svgBlip xmlns:ns9="http://schemas.microsoft.com/office/drawing/2016/SVG/main" r:embed="rId35"/>
+                  <ns9:svgBlip xmlns:ns9="http://schemas.microsoft.com/office/drawing/2016/SVG/main" r:embed="rId4"/>
                 </a:ext>
               </a:extLst>
             </a:blip>
@@ -5612,7 +5612,7 @@
             <a:blip r:embed="rId16">
               <a:extLst>
                 <a:ext uri="{96DAC541-7B7A-43D3-8B79-37D633B846F1}">
-                  <ns0:svgBlip xmlns:ns0="http://schemas.microsoft.com/office/drawing/2016/SVG/main" r:embed="rId17"/>
+                  <ns0:svgBlip xmlns:ns0="http://schemas.microsoft.com/office/drawing/2016/SVG/main" r:embed="rId15"/>
                 </a:ext>
               </a:extLst>
             </a:blip>
@@ -5741,7 +5741,7 @@
             <a:blip r:embed="rId18">
               <a:extLst>
                 <a:ext uri="{96DAC541-7B7A-43D3-8B79-37D633B846F1}">
-                  <ns1:svgBlip xmlns:ns1="http://schemas.microsoft.com/office/drawing/2016/SVG/main" r:embed="rId19"/>
+                  <ns1:svgBlip xmlns:ns1="http://schemas.microsoft.com/office/drawing/2016/SVG/main" r:embed="rId14"/>
                 </a:ext>
               </a:extLst>
             </a:blip>
@@ -5916,7 +5916,7 @@
             <a:blip r:embed="rId20">
               <a:extLst>
                 <a:ext uri="{96DAC541-7B7A-43D3-8B79-37D633B846F1}">
-                  <ns2:svgBlip xmlns:ns2="http://schemas.microsoft.com/office/drawing/2016/SVG/main" r:embed="rId21"/>
+                  <ns2:svgBlip xmlns:ns2="http://schemas.microsoft.com/office/drawing/2016/SVG/main" r:embed="rId13"/>
                 </a:ext>
               </a:extLst>
             </a:blip>
@@ -6093,7 +6093,7 @@
             <a:blip r:embed="rId22">
               <a:extLst>
                 <a:ext uri="{96DAC541-7B7A-43D3-8B79-37D633B846F1}">
-                  <ns3:svgBlip xmlns:ns3="http://schemas.microsoft.com/office/drawing/2016/SVG/main" r:embed="rId23"/>
+                  <ns3:svgBlip xmlns:ns3="http://schemas.microsoft.com/office/drawing/2016/SVG/main" r:embed="rId12"/>
                 </a:ext>
               </a:extLst>
             </a:blip>
@@ -6332,7 +6332,7 @@
             <a:blip r:embed="rId24">
               <a:extLst>
                 <a:ext uri="{96DAC541-7B7A-43D3-8B79-37D633B846F1}">
-                  <ns4:svgBlip xmlns:ns4="http://schemas.microsoft.com/office/drawing/2016/SVG/main" r:embed="rId25"/>
+                  <ns4:svgBlip xmlns:ns4="http://schemas.microsoft.com/office/drawing/2016/SVG/main" r:embed="rId11"/>
                 </a:ext>
               </a:extLst>
             </a:blip>
@@ -6459,7 +6459,7 @@
             <a:blip r:embed="rId26">
               <a:extLst>
                 <a:ext uri="{96DAC541-7B7A-43D3-8B79-37D633B846F1}">
-                  <ns5:svgBlip xmlns:ns5="http://schemas.microsoft.com/office/drawing/2016/SVG/main" r:embed="rId27"/>
+                  <ns5:svgBlip xmlns:ns5="http://schemas.microsoft.com/office/drawing/2016/SVG/main" r:embed="rId10"/>
                 </a:ext>
               </a:extLst>
             </a:blip>
@@ -6635,10 +6635,10 @@
             <p:nvPr/>
           </p:nvPicPr>
           <p:blipFill>
-            <a:blip r:embed="rId28">
+            <a:blip r:embed="rId9">
               <a:extLst>
                 <a:ext uri="{96DAC541-7B7A-43D3-8B79-37D633B846F1}">
-                  <ns6:svgBlip xmlns:ns6="http://schemas.microsoft.com/office/drawing/2016/SVG/main" r:embed="rId29"/>
+                  <ns6:svgBlip xmlns:ns6="http://schemas.microsoft.com/office/drawing/2016/SVG/main" r:embed="rId8"/>
                 </a:ext>
               </a:extLst>
             </a:blip>
@@ -6827,7 +6827,7 @@
             <a:blip r:embed="rId34">
               <a:extLst>
                 <a:ext uri="{96DAC541-7B7A-43D3-8B79-37D633B846F1}">
-                  <ns9:svgBlip xmlns:ns9="http://schemas.microsoft.com/office/drawing/2016/SVG/main" r:embed="rId35"/>
+                  <ns9:svgBlip xmlns:ns9="http://schemas.microsoft.com/office/drawing/2016/SVG/main" r:embed="rId4"/>
                 </a:ext>
               </a:extLst>
             </a:blip>
@@ -7007,10 +7007,10 @@
             <p:nvPr/>
           </p:nvPicPr>
           <p:blipFill>
-            <a:blip r:embed="rId32">
+            <a:blip r:embed="rId6">
               <a:extLst>
                 <a:ext uri="{96DAC541-7B7A-43D3-8B79-37D633B846F1}">
-                  <ns10:svgBlip xmlns:ns10="http://schemas.microsoft.com/office/drawing/2016/SVG/main" r:embed="rId33"/>
+                  <ns10:svgBlip xmlns:ns10="http://schemas.microsoft.com/office/drawing/2016/SVG/main" r:embed="rId5"/>
                 </a:ext>
               </a:extLst>
             </a:blip>
@@ -7189,7 +7189,7 @@
             <a:blip r:embed="rId36">
               <a:extLst>
                 <a:ext uri="{96DAC541-7B7A-43D3-8B79-37D633B846F1}">
-                  <ns11:svgBlip xmlns:ns11="http://schemas.microsoft.com/office/drawing/2016/SVG/main" r:embed="rId37"/>
+                  <ns11:svgBlip xmlns:ns11="http://schemas.microsoft.com/office/drawing/2016/SVG/main" r:embed="rId3"/>
                 </a:ext>
               </a:extLst>
             </a:blip>
@@ -8386,7 +8386,7 @@
             <a:blip r:embed="rId16">
               <a:extLst>
                 <a:ext uri="{96DAC541-7B7A-43D3-8B79-37D633B846F1}">
-                  <ns0:svgBlip xmlns:ns0="http://schemas.microsoft.com/office/drawing/2016/SVG/main" r:embed="rId17"/>
+                  <ns0:svgBlip xmlns:ns0="http://schemas.microsoft.com/office/drawing/2016/SVG/main" r:embed="rId15"/>
                 </a:ext>
               </a:extLst>
             </a:blip>
@@ -8515,7 +8515,7 @@
             <a:blip r:embed="rId18">
               <a:extLst>
                 <a:ext uri="{96DAC541-7B7A-43D3-8B79-37D633B846F1}">
-                  <ns1:svgBlip xmlns:ns1="http://schemas.microsoft.com/office/drawing/2016/SVG/main" r:embed="rId19"/>
+                  <ns1:svgBlip xmlns:ns1="http://schemas.microsoft.com/office/drawing/2016/SVG/main" r:embed="rId14"/>
                 </a:ext>
               </a:extLst>
             </a:blip>
@@ -8690,7 +8690,7 @@
             <a:blip r:embed="rId20">
               <a:extLst>
                 <a:ext uri="{96DAC541-7B7A-43D3-8B79-37D633B846F1}">
-                  <ns2:svgBlip xmlns:ns2="http://schemas.microsoft.com/office/drawing/2016/SVG/main" r:embed="rId21"/>
+                  <ns2:svgBlip xmlns:ns2="http://schemas.microsoft.com/office/drawing/2016/SVG/main" r:embed="rId13"/>
                 </a:ext>
               </a:extLst>
             </a:blip>
@@ -8867,7 +8867,7 @@
             <a:blip r:embed="rId22">
               <a:extLst>
                 <a:ext uri="{96DAC541-7B7A-43D3-8B79-37D633B846F1}">
-                  <ns3:svgBlip xmlns:ns3="http://schemas.microsoft.com/office/drawing/2016/SVG/main" r:embed="rId23"/>
+                  <ns3:svgBlip xmlns:ns3="http://schemas.microsoft.com/office/drawing/2016/SVG/main" r:embed="rId12"/>
                 </a:ext>
               </a:extLst>
             </a:blip>
@@ -9106,7 +9106,7 @@
             <a:blip r:embed="rId24">
               <a:extLst>
                 <a:ext uri="{96DAC541-7B7A-43D3-8B79-37D633B846F1}">
-                  <ns4:svgBlip xmlns:ns4="http://schemas.microsoft.com/office/drawing/2016/SVG/main" r:embed="rId25"/>
+                  <ns4:svgBlip xmlns:ns4="http://schemas.microsoft.com/office/drawing/2016/SVG/main" r:embed="rId11"/>
                 </a:ext>
               </a:extLst>
             </a:blip>
@@ -9233,7 +9233,7 @@
             <a:blip r:embed="rId26">
               <a:extLst>
                 <a:ext uri="{96DAC541-7B7A-43D3-8B79-37D633B846F1}">
-                  <ns5:svgBlip xmlns:ns5="http://schemas.microsoft.com/office/drawing/2016/SVG/main" r:embed="rId27"/>
+                  <ns5:svgBlip xmlns:ns5="http://schemas.microsoft.com/office/drawing/2016/SVG/main" r:embed="rId10"/>
                 </a:ext>
               </a:extLst>
             </a:blip>
@@ -9409,10 +9409,10 @@
             <p:nvPr/>
           </p:nvPicPr>
           <p:blipFill>
-            <a:blip r:embed="rId28">
+            <a:blip r:embed="rId9">
               <a:extLst>
                 <a:ext uri="{96DAC541-7B7A-43D3-8B79-37D633B846F1}">
-                  <ns6:svgBlip xmlns:ns6="http://schemas.microsoft.com/office/drawing/2016/SVG/main" r:embed="rId29"/>
+                  <ns6:svgBlip xmlns:ns6="http://schemas.microsoft.com/office/drawing/2016/SVG/main" r:embed="rId8"/>
                 </a:ext>
               </a:extLst>
             </a:blip>
@@ -9591,7 +9591,7 @@
             <a:blip r:embed="rId30">
               <a:extLst>
                 <a:ext uri="{96DAC541-7B7A-43D3-8B79-37D633B846F1}">
-                  <ns7:svgBlip xmlns:ns7="http://schemas.microsoft.com/office/drawing/2016/SVG/main" r:embed="rId31"/>
+                  <ns7:svgBlip xmlns:ns7="http://schemas.microsoft.com/office/drawing/2016/SVG/main" r:embed="rId7"/>
                 </a:ext>
               </a:extLst>
             </a:blip>
@@ -9769,10 +9769,10 @@
             <p:nvPr/>
           </p:nvPicPr>
           <p:blipFill>
-            <a:blip r:embed="rId32">
+            <a:blip r:embed="rId6">
               <a:extLst>
                 <a:ext uri="{96DAC541-7B7A-43D3-8B79-37D633B846F1}">
-                  <ns8:svgBlip xmlns:ns8="http://schemas.microsoft.com/office/drawing/2016/SVG/main" r:embed="rId33"/>
+                  <ns8:svgBlip xmlns:ns8="http://schemas.microsoft.com/office/drawing/2016/SVG/main" r:embed="rId5"/>
                 </a:ext>
               </a:extLst>
             </a:blip>
@@ -9961,7 +9961,7 @@
             <a:blip r:embed="rId34">
               <a:extLst>
                 <a:ext uri="{96DAC541-7B7A-43D3-8B79-37D633B846F1}">
-                  <ns9:svgBlip xmlns:ns9="http://schemas.microsoft.com/office/drawing/2016/SVG/main" r:embed="rId35"/>
+                  <ns9:svgBlip xmlns:ns9="http://schemas.microsoft.com/office/drawing/2016/SVG/main" r:embed="rId4"/>
                 </a:ext>
               </a:extLst>
             </a:blip>
@@ -10141,10 +10141,10 @@
             <p:nvPr/>
           </p:nvPicPr>
           <p:blipFill>
-            <a:blip r:embed="rId32">
+            <a:blip r:embed="rId6">
               <a:extLst>
                 <a:ext uri="{96DAC541-7B7A-43D3-8B79-37D633B846F1}">
-                  <ns10:svgBlip xmlns:ns10="http://schemas.microsoft.com/office/drawing/2016/SVG/main" r:embed="rId33"/>
+                  <ns10:svgBlip xmlns:ns10="http://schemas.microsoft.com/office/drawing/2016/SVG/main" r:embed="rId5"/>
                 </a:ext>
               </a:extLst>
             </a:blip>
@@ -10323,7 +10323,7 @@
             <a:blip r:embed="rId36">
               <a:extLst>
                 <a:ext uri="{96DAC541-7B7A-43D3-8B79-37D633B846F1}">
-                  <ns11:svgBlip xmlns:ns11="http://schemas.microsoft.com/office/drawing/2016/SVG/main" r:embed="rId37"/>
+                  <ns11:svgBlip xmlns:ns11="http://schemas.microsoft.com/office/drawing/2016/SVG/main" r:embed="rId3"/>
                 </a:ext>
               </a:extLst>
             </a:blip>
@@ -10504,7 +10504,7 @@
             <a:blip r:embed="rId26">
               <a:extLst>
                 <a:ext uri="{96DAC541-7B7A-43D3-8B79-37D633B846F1}">
-                  <ns12:svgBlip xmlns:ns12="http://schemas.microsoft.com/office/drawing/2016/SVG/main" r:embed="rId27"/>
+                  <ns12:svgBlip xmlns:ns12="http://schemas.microsoft.com/office/drawing/2016/SVG/main" r:embed="rId10"/>
                 </a:ext>
               </a:extLst>
             </a:blip>
@@ -10691,7 +10691,7 @@
             <a:blip r:embed="rId42">
               <a:extLst>
                 <a:ext uri="{96DAC541-7B7A-43D3-8B79-37D633B846F1}">
-                  <ns15:svgBlip xmlns:ns15="http://schemas.microsoft.com/office/drawing/2016/SVG/main" r:embed="rId43"/>
+                  <ns15:svgBlip xmlns:ns15="http://schemas.microsoft.com/office/drawing/2016/SVG/main" r:embed="rId46"/>
                 </a:ext>
               </a:extLst>
             </a:blip>
@@ -11806,7 +11806,7 @@
             <a:blip r:embed="rId16">
               <a:extLst>
                 <a:ext uri="{96DAC541-7B7A-43D3-8B79-37D633B846F1}">
-                  <ns0:svgBlip xmlns:ns0="http://schemas.microsoft.com/office/drawing/2016/SVG/main" r:embed="rId17"/>
+                  <ns0:svgBlip xmlns:ns0="http://schemas.microsoft.com/office/drawing/2016/SVG/main" r:embed="rId15"/>
                 </a:ext>
               </a:extLst>
             </a:blip>
@@ -11935,7 +11935,7 @@
             <a:blip r:embed="rId18">
               <a:extLst>
                 <a:ext uri="{96DAC541-7B7A-43D3-8B79-37D633B846F1}">
-                  <ns1:svgBlip xmlns:ns1="http://schemas.microsoft.com/office/drawing/2016/SVG/main" r:embed="rId19"/>
+                  <ns1:svgBlip xmlns:ns1="http://schemas.microsoft.com/office/drawing/2016/SVG/main" r:embed="rId14"/>
                 </a:ext>
               </a:extLst>
             </a:blip>
@@ -12110,7 +12110,7 @@
             <a:blip r:embed="rId20">
               <a:extLst>
                 <a:ext uri="{96DAC541-7B7A-43D3-8B79-37D633B846F1}">
-                  <ns2:svgBlip xmlns:ns2="http://schemas.microsoft.com/office/drawing/2016/SVG/main" r:embed="rId21"/>
+                  <ns2:svgBlip xmlns:ns2="http://schemas.microsoft.com/office/drawing/2016/SVG/main" r:embed="rId13"/>
                 </a:ext>
               </a:extLst>
             </a:blip>
@@ -12287,7 +12287,7 @@
             <a:blip r:embed="rId22">
               <a:extLst>
                 <a:ext uri="{96DAC541-7B7A-43D3-8B79-37D633B846F1}">
-                  <ns3:svgBlip xmlns:ns3="http://schemas.microsoft.com/office/drawing/2016/SVG/main" r:embed="rId23"/>
+                  <ns3:svgBlip xmlns:ns3="http://schemas.microsoft.com/office/drawing/2016/SVG/main" r:embed="rId12"/>
                 </a:ext>
               </a:extLst>
             </a:blip>
@@ -12526,7 +12526,7 @@
             <a:blip r:embed="rId24">
               <a:extLst>
                 <a:ext uri="{96DAC541-7B7A-43D3-8B79-37D633B846F1}">
-                  <ns4:svgBlip xmlns:ns4="http://schemas.microsoft.com/office/drawing/2016/SVG/main" r:embed="rId25"/>
+                  <ns4:svgBlip xmlns:ns4="http://schemas.microsoft.com/office/drawing/2016/SVG/main" r:embed="rId11"/>
                 </a:ext>
               </a:extLst>
             </a:blip>
@@ -12653,7 +12653,7 @@
             <a:blip r:embed="rId26">
               <a:extLst>
                 <a:ext uri="{96DAC541-7B7A-43D3-8B79-37D633B846F1}">
-                  <ns5:svgBlip xmlns:ns5="http://schemas.microsoft.com/office/drawing/2016/SVG/main" r:embed="rId27"/>
+                  <ns5:svgBlip xmlns:ns5="http://schemas.microsoft.com/office/drawing/2016/SVG/main" r:embed="rId10"/>
                 </a:ext>
               </a:extLst>
             </a:blip>
@@ -12829,10 +12829,10 @@
             <p:nvPr/>
           </p:nvPicPr>
           <p:blipFill>
-            <a:blip r:embed="rId28">
+            <a:blip r:embed="rId9">
               <a:extLst>
                 <a:ext uri="{96DAC541-7B7A-43D3-8B79-37D633B846F1}">
-                  <ns6:svgBlip xmlns:ns6="http://schemas.microsoft.com/office/drawing/2016/SVG/main" r:embed="rId29"/>
+                  <ns6:svgBlip xmlns:ns6="http://schemas.microsoft.com/office/drawing/2016/SVG/main" r:embed="rId8"/>
                 </a:ext>
               </a:extLst>
             </a:blip>
@@ -13011,7 +13011,7 @@
             <a:blip r:embed="rId30">
               <a:extLst>
                 <a:ext uri="{96DAC541-7B7A-43D3-8B79-37D633B846F1}">
-                  <ns7:svgBlip xmlns:ns7="http://schemas.microsoft.com/office/drawing/2016/SVG/main" r:embed="rId31"/>
+                  <ns7:svgBlip xmlns:ns7="http://schemas.microsoft.com/office/drawing/2016/SVG/main" r:embed="rId7"/>
                 </a:ext>
               </a:extLst>
             </a:blip>
@@ -13189,10 +13189,10 @@
             <p:nvPr/>
           </p:nvPicPr>
           <p:blipFill>
-            <a:blip r:embed="rId32">
+            <a:blip r:embed="rId6">
               <a:extLst>
                 <a:ext uri="{96DAC541-7B7A-43D3-8B79-37D633B846F1}">
-                  <ns8:svgBlip xmlns:ns8="http://schemas.microsoft.com/office/drawing/2016/SVG/main" r:embed="rId33"/>
+                  <ns8:svgBlip xmlns:ns8="http://schemas.microsoft.com/office/drawing/2016/SVG/main" r:embed="rId5"/>
                 </a:ext>
               </a:extLst>
             </a:blip>
@@ -13381,7 +13381,7 @@
             <a:blip r:embed="rId34">
               <a:extLst>
                 <a:ext uri="{96DAC541-7B7A-43D3-8B79-37D633B846F1}">
-                  <ns9:svgBlip xmlns:ns9="http://schemas.microsoft.com/office/drawing/2016/SVG/main" r:embed="rId35"/>
+                  <ns9:svgBlip xmlns:ns9="http://schemas.microsoft.com/office/drawing/2016/SVG/main" r:embed="rId4"/>
                 </a:ext>
               </a:extLst>
             </a:blip>
@@ -13561,10 +13561,10 @@
             <p:nvPr/>
           </p:nvPicPr>
           <p:blipFill>
-            <a:blip r:embed="rId32">
+            <a:blip r:embed="rId6">
               <a:extLst>
                 <a:ext uri="{96DAC541-7B7A-43D3-8B79-37D633B846F1}">
-                  <ns10:svgBlip xmlns:ns10="http://schemas.microsoft.com/office/drawing/2016/SVG/main" r:embed="rId33"/>
+                  <ns10:svgBlip xmlns:ns10="http://schemas.microsoft.com/office/drawing/2016/SVG/main" r:embed="rId5"/>
                 </a:ext>
               </a:extLst>
             </a:blip>
@@ -13743,7 +13743,7 @@
             <a:blip r:embed="rId36">
               <a:extLst>
                 <a:ext uri="{96DAC541-7B7A-43D3-8B79-37D633B846F1}">
-                  <ns11:svgBlip xmlns:ns11="http://schemas.microsoft.com/office/drawing/2016/SVG/main" r:embed="rId37"/>
+                  <ns11:svgBlip xmlns:ns11="http://schemas.microsoft.com/office/drawing/2016/SVG/main" r:embed="rId3"/>
                 </a:ext>
               </a:extLst>
             </a:blip>
@@ -13924,7 +13924,7 @@
             <a:blip r:embed="rId26">
               <a:extLst>
                 <a:ext uri="{96DAC541-7B7A-43D3-8B79-37D633B846F1}">
-                  <ns12:svgBlip xmlns:ns12="http://schemas.microsoft.com/office/drawing/2016/SVG/main" r:embed="rId27"/>
+                  <ns12:svgBlip xmlns:ns12="http://schemas.microsoft.com/office/drawing/2016/SVG/main" r:embed="rId10"/>
                 </a:ext>
               </a:extLst>
             </a:blip>
@@ -14111,7 +14111,7 @@
             <a:blip r:embed="rId42">
               <a:extLst>
                 <a:ext uri="{96DAC541-7B7A-43D3-8B79-37D633B846F1}">
-                  <ns15:svgBlip xmlns:ns15="http://schemas.microsoft.com/office/drawing/2016/SVG/main" r:embed="rId43"/>
+                  <ns15:svgBlip xmlns:ns15="http://schemas.microsoft.com/office/drawing/2016/SVG/main" r:embed="rId46"/>
                 </a:ext>
               </a:extLst>
             </a:blip>
@@ -15317,7 +15317,7 @@
             <a:blip r:embed="rId16">
               <a:extLst>
                 <a:ext uri="{96DAC541-7B7A-43D3-8B79-37D633B846F1}">
-                  <ns0:svgBlip xmlns:ns0="http://schemas.microsoft.com/office/drawing/2016/SVG/main" r:embed="rId17"/>
+                  <ns0:svgBlip xmlns:ns0="http://schemas.microsoft.com/office/drawing/2016/SVG/main" r:embed="rId15"/>
                 </a:ext>
               </a:extLst>
             </a:blip>
@@ -15446,7 +15446,7 @@
             <a:blip r:embed="rId18">
               <a:extLst>
                 <a:ext uri="{96DAC541-7B7A-43D3-8B79-37D633B846F1}">
-                  <ns1:svgBlip xmlns:ns1="http://schemas.microsoft.com/office/drawing/2016/SVG/main" r:embed="rId19"/>
+                  <ns1:svgBlip xmlns:ns1="http://schemas.microsoft.com/office/drawing/2016/SVG/main" r:embed="rId14"/>
                 </a:ext>
               </a:extLst>
             </a:blip>
@@ -15621,7 +15621,7 @@
             <a:blip r:embed="rId20">
               <a:extLst>
                 <a:ext uri="{96DAC541-7B7A-43D3-8B79-37D633B846F1}">
-                  <ns2:svgBlip xmlns:ns2="http://schemas.microsoft.com/office/drawing/2016/SVG/main" r:embed="rId21"/>
+                  <ns2:svgBlip xmlns:ns2="http://schemas.microsoft.com/office/drawing/2016/SVG/main" r:embed="rId13"/>
                 </a:ext>
               </a:extLst>
             </a:blip>
@@ -15798,7 +15798,7 @@
             <a:blip r:embed="rId22">
               <a:extLst>
                 <a:ext uri="{96DAC541-7B7A-43D3-8B79-37D633B846F1}">
-                  <ns3:svgBlip xmlns:ns3="http://schemas.microsoft.com/office/drawing/2016/SVG/main" r:embed="rId23"/>
+                  <ns3:svgBlip xmlns:ns3="http://schemas.microsoft.com/office/drawing/2016/SVG/main" r:embed="rId12"/>
                 </a:ext>
               </a:extLst>
             </a:blip>
@@ -16037,7 +16037,7 @@
             <a:blip r:embed="rId24">
               <a:extLst>
                 <a:ext uri="{96DAC541-7B7A-43D3-8B79-37D633B846F1}">
-                  <ns4:svgBlip xmlns:ns4="http://schemas.microsoft.com/office/drawing/2016/SVG/main" r:embed="rId25"/>
+                  <ns4:svgBlip xmlns:ns4="http://schemas.microsoft.com/office/drawing/2016/SVG/main" r:embed="rId11"/>
                 </a:ext>
               </a:extLst>
             </a:blip>
@@ -16164,7 +16164,7 @@
             <a:blip r:embed="rId26">
               <a:extLst>
                 <a:ext uri="{96DAC541-7B7A-43D3-8B79-37D633B846F1}">
-                  <ns5:svgBlip xmlns:ns5="http://schemas.microsoft.com/office/drawing/2016/SVG/main" r:embed="rId27"/>
+                  <ns5:svgBlip xmlns:ns5="http://schemas.microsoft.com/office/drawing/2016/SVG/main" r:embed="rId10"/>
                 </a:ext>
               </a:extLst>
             </a:blip>
@@ -16340,10 +16340,10 @@
             <p:nvPr/>
           </p:nvPicPr>
           <p:blipFill>
-            <a:blip r:embed="rId28">
+            <a:blip r:embed="rId9">
               <a:extLst>
                 <a:ext uri="{96DAC541-7B7A-43D3-8B79-37D633B846F1}">
-                  <ns6:svgBlip xmlns:ns6="http://schemas.microsoft.com/office/drawing/2016/SVG/main" r:embed="rId29"/>
+                  <ns6:svgBlip xmlns:ns6="http://schemas.microsoft.com/office/drawing/2016/SVG/main" r:embed="rId8"/>
                 </a:ext>
               </a:extLst>
             </a:blip>
@@ -16522,7 +16522,7 @@
             <a:blip r:embed="rId30">
               <a:extLst>
                 <a:ext uri="{96DAC541-7B7A-43D3-8B79-37D633B846F1}">
-                  <ns7:svgBlip xmlns:ns7="http://schemas.microsoft.com/office/drawing/2016/SVG/main" r:embed="rId31"/>
+                  <ns7:svgBlip xmlns:ns7="http://schemas.microsoft.com/office/drawing/2016/SVG/main" r:embed="rId7"/>
                 </a:ext>
               </a:extLst>
             </a:blip>
@@ -16700,10 +16700,10 @@
             <p:nvPr/>
           </p:nvPicPr>
           <p:blipFill>
-            <a:blip r:embed="rId32">
+            <a:blip r:embed="rId6">
               <a:extLst>
                 <a:ext uri="{96DAC541-7B7A-43D3-8B79-37D633B846F1}">
-                  <ns8:svgBlip xmlns:ns8="http://schemas.microsoft.com/office/drawing/2016/SVG/main" r:embed="rId33"/>
+                  <ns8:svgBlip xmlns:ns8="http://schemas.microsoft.com/office/drawing/2016/SVG/main" r:embed="rId5"/>
                 </a:ext>
               </a:extLst>
             </a:blip>
@@ -16892,7 +16892,7 @@
             <a:blip r:embed="rId34">
               <a:extLst>
                 <a:ext uri="{96DAC541-7B7A-43D3-8B79-37D633B846F1}">
-                  <ns9:svgBlip xmlns:ns9="http://schemas.microsoft.com/office/drawing/2016/SVG/main" r:embed="rId35"/>
+                  <ns9:svgBlip xmlns:ns9="http://schemas.microsoft.com/office/drawing/2016/SVG/main" r:embed="rId4"/>
                 </a:ext>
               </a:extLst>
             </a:blip>
@@ -17072,10 +17072,10 @@
             <p:nvPr/>
           </p:nvPicPr>
           <p:blipFill>
-            <a:blip r:embed="rId32">
+            <a:blip r:embed="rId6">
               <a:extLst>
                 <a:ext uri="{96DAC541-7B7A-43D3-8B79-37D633B846F1}">
-                  <ns10:svgBlip xmlns:ns10="http://schemas.microsoft.com/office/drawing/2016/SVG/main" r:embed="rId33"/>
+                  <ns10:svgBlip xmlns:ns10="http://schemas.microsoft.com/office/drawing/2016/SVG/main" r:embed="rId5"/>
                 </a:ext>
               </a:extLst>
             </a:blip>
@@ -17254,7 +17254,7 @@
             <a:blip r:embed="rId36">
               <a:extLst>
                 <a:ext uri="{96DAC541-7B7A-43D3-8B79-37D633B846F1}">
-                  <ns11:svgBlip xmlns:ns11="http://schemas.microsoft.com/office/drawing/2016/SVG/main" r:embed="rId37"/>
+                  <ns11:svgBlip xmlns:ns11="http://schemas.microsoft.com/office/drawing/2016/SVG/main" r:embed="rId3"/>
                 </a:ext>
               </a:extLst>
             </a:blip>
@@ -17435,7 +17435,7 @@
             <a:blip r:embed="rId26">
               <a:extLst>
                 <a:ext uri="{96DAC541-7B7A-43D3-8B79-37D633B846F1}">
-                  <ns12:svgBlip xmlns:ns12="http://schemas.microsoft.com/office/drawing/2016/SVG/main" r:embed="rId27"/>
+                  <ns12:svgBlip xmlns:ns12="http://schemas.microsoft.com/office/drawing/2016/SVG/main" r:embed="rId10"/>
                 </a:ext>
               </a:extLst>
             </a:blip>
@@ -17622,7 +17622,7 @@
             <a:blip r:embed="rId38">
               <a:extLst>
                 <a:ext uri="{96DAC541-7B7A-43D3-8B79-37D633B846F1}">
-                  <ns13:svgBlip xmlns:ns13="http://schemas.microsoft.com/office/drawing/2016/SVG/main" r:embed="rId39"/>
+                  <ns13:svgBlip xmlns:ns13="http://schemas.microsoft.com/office/drawing/2016/SVG/main" r:embed="rId44"/>
                 </a:ext>
               </a:extLst>
             </a:blip>
@@ -17809,7 +17809,7 @@
             <a:blip r:embed="rId40">
               <a:extLst>
                 <a:ext uri="{96DAC541-7B7A-43D3-8B79-37D633B846F1}">
-                  <ns14:svgBlip xmlns:ns14="http://schemas.microsoft.com/office/drawing/2016/SVG/main" r:embed="rId41"/>
+                  <ns14:svgBlip xmlns:ns14="http://schemas.microsoft.com/office/drawing/2016/SVG/main" r:embed="rId45"/>
                 </a:ext>
               </a:extLst>
             </a:blip>
@@ -17998,7 +17998,7 @@
             <a:blip r:embed="rId42">
               <a:extLst>
                 <a:ext uri="{96DAC541-7B7A-43D3-8B79-37D633B846F1}">
-                  <ns15:svgBlip xmlns:ns15="http://schemas.microsoft.com/office/drawing/2016/SVG/main" r:embed="rId43"/>
+                  <ns15:svgBlip xmlns:ns15="http://schemas.microsoft.com/office/drawing/2016/SVG/main" r:embed="rId46"/>
                 </a:ext>
               </a:extLst>
             </a:blip>

--- a/RAG_Workshop_Fokusfolien.pptx
+++ b/RAG_Workshop_Fokusfolien.pptx
@@ -4461,7 +4461,7 @@
             <a:blip r:embed="rId18">
               <a:extLst>
                 <a:ext uri="{96DAC541-7B7A-43D3-8B79-37D633B846F1}">
-                  <ns1:svgBlip xmlns:ns1="http://schemas.microsoft.com/office/drawing/2016/SVG/main" r:embed="rId14"/>
+                  <ns1:svgBlip xmlns:ns1="http://schemas.microsoft.com/office/drawing/2016/SVG/main" r:embed="rId32"/>
                 </a:ext>
               </a:extLst>
             </a:blip>
@@ -4636,7 +4636,7 @@
             <a:blip r:embed="rId20">
               <a:extLst>
                 <a:ext uri="{96DAC541-7B7A-43D3-8B79-37D633B846F1}">
-                  <ns2:svgBlip xmlns:ns2="http://schemas.microsoft.com/office/drawing/2016/SVG/main" r:embed="rId13"/>
+                  <ns2:svgBlip xmlns:ns2="http://schemas.microsoft.com/office/drawing/2016/SVG/main" r:embed="rId33"/>
                 </a:ext>
               </a:extLst>
             </a:blip>
@@ -4819,7 +4819,7 @@
             <a:blip r:embed="rId34">
               <a:extLst>
                 <a:ext uri="{96DAC541-7B7A-43D3-8B79-37D633B846F1}">
-                  <ns9:svgBlip xmlns:ns9="http://schemas.microsoft.com/office/drawing/2016/SVG/main" r:embed="rId4"/>
+                  <ns9:svgBlip xmlns:ns9="http://schemas.microsoft.com/office/drawing/2016/SVG/main" r:embed="rId41"/>
                 </a:ext>
               </a:extLst>
             </a:blip>
@@ -5612,7 +5612,7 @@
             <a:blip r:embed="rId16">
               <a:extLst>
                 <a:ext uri="{96DAC541-7B7A-43D3-8B79-37D633B846F1}">
-                  <ns0:svgBlip xmlns:ns0="http://schemas.microsoft.com/office/drawing/2016/SVG/main" r:embed="rId15"/>
+                  <ns0:svgBlip xmlns:ns0="http://schemas.microsoft.com/office/drawing/2016/SVG/main" r:embed="rId31"/>
                 </a:ext>
               </a:extLst>
             </a:blip>
@@ -5741,7 +5741,7 @@
             <a:blip r:embed="rId18">
               <a:extLst>
                 <a:ext uri="{96DAC541-7B7A-43D3-8B79-37D633B846F1}">
-                  <ns1:svgBlip xmlns:ns1="http://schemas.microsoft.com/office/drawing/2016/SVG/main" r:embed="rId14"/>
+                  <ns1:svgBlip xmlns:ns1="http://schemas.microsoft.com/office/drawing/2016/SVG/main" r:embed="rId32"/>
                 </a:ext>
               </a:extLst>
             </a:blip>
@@ -5916,7 +5916,7 @@
             <a:blip r:embed="rId20">
               <a:extLst>
                 <a:ext uri="{96DAC541-7B7A-43D3-8B79-37D633B846F1}">
-                  <ns2:svgBlip xmlns:ns2="http://schemas.microsoft.com/office/drawing/2016/SVG/main" r:embed="rId13"/>
+                  <ns2:svgBlip xmlns:ns2="http://schemas.microsoft.com/office/drawing/2016/SVG/main" r:embed="rId33"/>
                 </a:ext>
               </a:extLst>
             </a:blip>
@@ -6093,7 +6093,7 @@
             <a:blip r:embed="rId22">
               <a:extLst>
                 <a:ext uri="{96DAC541-7B7A-43D3-8B79-37D633B846F1}">
-                  <ns3:svgBlip xmlns:ns3="http://schemas.microsoft.com/office/drawing/2016/SVG/main" r:embed="rId12"/>
+                  <ns3:svgBlip xmlns:ns3="http://schemas.microsoft.com/office/drawing/2016/SVG/main" r:embed="rId29"/>
                 </a:ext>
               </a:extLst>
             </a:blip>
@@ -6332,7 +6332,7 @@
             <a:blip r:embed="rId24">
               <a:extLst>
                 <a:ext uri="{96DAC541-7B7A-43D3-8B79-37D633B846F1}">
-                  <ns4:svgBlip xmlns:ns4="http://schemas.microsoft.com/office/drawing/2016/SVG/main" r:embed="rId11"/>
+                  <ns4:svgBlip xmlns:ns4="http://schemas.microsoft.com/office/drawing/2016/SVG/main" r:embed="rId35"/>
                 </a:ext>
               </a:extLst>
             </a:blip>
@@ -6459,7 +6459,7 @@
             <a:blip r:embed="rId26">
               <a:extLst>
                 <a:ext uri="{96DAC541-7B7A-43D3-8B79-37D633B846F1}">
-                  <ns5:svgBlip xmlns:ns5="http://schemas.microsoft.com/office/drawing/2016/SVG/main" r:embed="rId10"/>
+                  <ns5:svgBlip xmlns:ns5="http://schemas.microsoft.com/office/drawing/2016/SVG/main" r:embed="rId28"/>
                 </a:ext>
               </a:extLst>
             </a:blip>
@@ -6638,7 +6638,7 @@
             <a:blip r:embed="rId9">
               <a:extLst>
                 <a:ext uri="{96DAC541-7B7A-43D3-8B79-37D633B846F1}">
-                  <ns6:svgBlip xmlns:ns6="http://schemas.microsoft.com/office/drawing/2016/SVG/main" r:embed="rId8"/>
+                  <ns6:svgBlip xmlns:ns6="http://schemas.microsoft.com/office/drawing/2016/SVG/main" r:embed="rId37"/>
                 </a:ext>
               </a:extLst>
             </a:blip>
@@ -6827,7 +6827,7 @@
             <a:blip r:embed="rId34">
               <a:extLst>
                 <a:ext uri="{96DAC541-7B7A-43D3-8B79-37D633B846F1}">
-                  <ns9:svgBlip xmlns:ns9="http://schemas.microsoft.com/office/drawing/2016/SVG/main" r:embed="rId4"/>
+                  <ns9:svgBlip xmlns:ns9="http://schemas.microsoft.com/office/drawing/2016/SVG/main" r:embed="rId41"/>
                 </a:ext>
               </a:extLst>
             </a:blip>
@@ -7007,10 +7007,10 @@
             <p:nvPr/>
           </p:nvPicPr>
           <p:blipFill>
-            <a:blip r:embed="rId6">
+            <a:blip r:embed="rId39">
               <a:extLst>
                 <a:ext uri="{96DAC541-7B7A-43D3-8B79-37D633B846F1}">
-                  <ns10:svgBlip xmlns:ns10="http://schemas.microsoft.com/office/drawing/2016/SVG/main" r:embed="rId5"/>
+                  <ns10:svgBlip xmlns:ns10="http://schemas.microsoft.com/office/drawing/2016/SVG/main" r:embed="rId25"/>
                 </a:ext>
               </a:extLst>
             </a:blip>
@@ -7189,7 +7189,7 @@
             <a:blip r:embed="rId36">
               <a:extLst>
                 <a:ext uri="{96DAC541-7B7A-43D3-8B79-37D633B846F1}">
-                  <ns11:svgBlip xmlns:ns11="http://schemas.microsoft.com/office/drawing/2016/SVG/main" r:embed="rId3"/>
+                  <ns11:svgBlip xmlns:ns11="http://schemas.microsoft.com/office/drawing/2016/SVG/main" r:embed="rId23"/>
                 </a:ext>
               </a:extLst>
             </a:blip>
@@ -8386,7 +8386,7 @@
             <a:blip r:embed="rId16">
               <a:extLst>
                 <a:ext uri="{96DAC541-7B7A-43D3-8B79-37D633B846F1}">
-                  <ns0:svgBlip xmlns:ns0="http://schemas.microsoft.com/office/drawing/2016/SVG/main" r:embed="rId15"/>
+                  <ns0:svgBlip xmlns:ns0="http://schemas.microsoft.com/office/drawing/2016/SVG/main" r:embed="rId31"/>
                 </a:ext>
               </a:extLst>
             </a:blip>
@@ -8515,7 +8515,7 @@
             <a:blip r:embed="rId18">
               <a:extLst>
                 <a:ext uri="{96DAC541-7B7A-43D3-8B79-37D633B846F1}">
-                  <ns1:svgBlip xmlns:ns1="http://schemas.microsoft.com/office/drawing/2016/SVG/main" r:embed="rId14"/>
+                  <ns1:svgBlip xmlns:ns1="http://schemas.microsoft.com/office/drawing/2016/SVG/main" r:embed="rId32"/>
                 </a:ext>
               </a:extLst>
             </a:blip>
@@ -8690,7 +8690,7 @@
             <a:blip r:embed="rId20">
               <a:extLst>
                 <a:ext uri="{96DAC541-7B7A-43D3-8B79-37D633B846F1}">
-                  <ns2:svgBlip xmlns:ns2="http://schemas.microsoft.com/office/drawing/2016/SVG/main" r:embed="rId13"/>
+                  <ns2:svgBlip xmlns:ns2="http://schemas.microsoft.com/office/drawing/2016/SVG/main" r:embed="rId33"/>
                 </a:ext>
               </a:extLst>
             </a:blip>
@@ -8867,7 +8867,7 @@
             <a:blip r:embed="rId22">
               <a:extLst>
                 <a:ext uri="{96DAC541-7B7A-43D3-8B79-37D633B846F1}">
-                  <ns3:svgBlip xmlns:ns3="http://schemas.microsoft.com/office/drawing/2016/SVG/main" r:embed="rId12"/>
+                  <ns3:svgBlip xmlns:ns3="http://schemas.microsoft.com/office/drawing/2016/SVG/main" r:embed="rId29"/>
                 </a:ext>
               </a:extLst>
             </a:blip>
@@ -9106,7 +9106,7 @@
             <a:blip r:embed="rId24">
               <a:extLst>
                 <a:ext uri="{96DAC541-7B7A-43D3-8B79-37D633B846F1}">
-                  <ns4:svgBlip xmlns:ns4="http://schemas.microsoft.com/office/drawing/2016/SVG/main" r:embed="rId11"/>
+                  <ns4:svgBlip xmlns:ns4="http://schemas.microsoft.com/office/drawing/2016/SVG/main" r:embed="rId35"/>
                 </a:ext>
               </a:extLst>
             </a:blip>
@@ -9233,7 +9233,7 @@
             <a:blip r:embed="rId26">
               <a:extLst>
                 <a:ext uri="{96DAC541-7B7A-43D3-8B79-37D633B846F1}">
-                  <ns5:svgBlip xmlns:ns5="http://schemas.microsoft.com/office/drawing/2016/SVG/main" r:embed="rId10"/>
+                  <ns5:svgBlip xmlns:ns5="http://schemas.microsoft.com/office/drawing/2016/SVG/main" r:embed="rId28"/>
                 </a:ext>
               </a:extLst>
             </a:blip>
@@ -9412,7 +9412,7 @@
             <a:blip r:embed="rId9">
               <a:extLst>
                 <a:ext uri="{96DAC541-7B7A-43D3-8B79-37D633B846F1}">
-                  <ns6:svgBlip xmlns:ns6="http://schemas.microsoft.com/office/drawing/2016/SVG/main" r:embed="rId8"/>
+                  <ns6:svgBlip xmlns:ns6="http://schemas.microsoft.com/office/drawing/2016/SVG/main" r:embed="rId37"/>
                 </a:ext>
               </a:extLst>
             </a:blip>
@@ -9591,7 +9591,7 @@
             <a:blip r:embed="rId30">
               <a:extLst>
                 <a:ext uri="{96DAC541-7B7A-43D3-8B79-37D633B846F1}">
-                  <ns7:svgBlip xmlns:ns7="http://schemas.microsoft.com/office/drawing/2016/SVG/main" r:embed="rId7"/>
+                  <ns7:svgBlip xmlns:ns7="http://schemas.microsoft.com/office/drawing/2016/SVG/main" r:embed="rId27"/>
                 </a:ext>
               </a:extLst>
             </a:blip>
@@ -9769,10 +9769,10 @@
             <p:nvPr/>
           </p:nvPicPr>
           <p:blipFill>
-            <a:blip r:embed="rId6">
+            <a:blip r:embed="rId39">
               <a:extLst>
                 <a:ext uri="{96DAC541-7B7A-43D3-8B79-37D633B846F1}">
-                  <ns8:svgBlip xmlns:ns8="http://schemas.microsoft.com/office/drawing/2016/SVG/main" r:embed="rId5"/>
+                  <ns8:svgBlip xmlns:ns8="http://schemas.microsoft.com/office/drawing/2016/SVG/main" r:embed="rId25"/>
                 </a:ext>
               </a:extLst>
             </a:blip>
@@ -9961,7 +9961,7 @@
             <a:blip r:embed="rId34">
               <a:extLst>
                 <a:ext uri="{96DAC541-7B7A-43D3-8B79-37D633B846F1}">
-                  <ns9:svgBlip xmlns:ns9="http://schemas.microsoft.com/office/drawing/2016/SVG/main" r:embed="rId4"/>
+                  <ns9:svgBlip xmlns:ns9="http://schemas.microsoft.com/office/drawing/2016/SVG/main" r:embed="rId41"/>
                 </a:ext>
               </a:extLst>
             </a:blip>
@@ -10141,10 +10141,10 @@
             <p:nvPr/>
           </p:nvPicPr>
           <p:blipFill>
-            <a:blip r:embed="rId6">
+            <a:blip r:embed="rId39">
               <a:extLst>
                 <a:ext uri="{96DAC541-7B7A-43D3-8B79-37D633B846F1}">
-                  <ns10:svgBlip xmlns:ns10="http://schemas.microsoft.com/office/drawing/2016/SVG/main" r:embed="rId5"/>
+                  <ns10:svgBlip xmlns:ns10="http://schemas.microsoft.com/office/drawing/2016/SVG/main" r:embed="rId25"/>
                 </a:ext>
               </a:extLst>
             </a:blip>
@@ -10323,7 +10323,7 @@
             <a:blip r:embed="rId36">
               <a:extLst>
                 <a:ext uri="{96DAC541-7B7A-43D3-8B79-37D633B846F1}">
-                  <ns11:svgBlip xmlns:ns11="http://schemas.microsoft.com/office/drawing/2016/SVG/main" r:embed="rId3"/>
+                  <ns11:svgBlip xmlns:ns11="http://schemas.microsoft.com/office/drawing/2016/SVG/main" r:embed="rId23"/>
                 </a:ext>
               </a:extLst>
             </a:blip>
@@ -10504,7 +10504,7 @@
             <a:blip r:embed="rId26">
               <a:extLst>
                 <a:ext uri="{96DAC541-7B7A-43D3-8B79-37D633B846F1}">
-                  <ns12:svgBlip xmlns:ns12="http://schemas.microsoft.com/office/drawing/2016/SVG/main" r:embed="rId10"/>
+                  <ns12:svgBlip xmlns:ns12="http://schemas.microsoft.com/office/drawing/2016/SVG/main" r:embed="rId28"/>
                 </a:ext>
               </a:extLst>
             </a:blip>
@@ -10691,7 +10691,7 @@
             <a:blip r:embed="rId42">
               <a:extLst>
                 <a:ext uri="{96DAC541-7B7A-43D3-8B79-37D633B846F1}">
-                  <ns15:svgBlip xmlns:ns15="http://schemas.microsoft.com/office/drawing/2016/SVG/main" r:embed="rId46"/>
+                  <ns15:svgBlip xmlns:ns15="http://schemas.microsoft.com/office/drawing/2016/SVG/main" r:embed="rId19"/>
                 </a:ext>
               </a:extLst>
             </a:blip>
@@ -11806,7 +11806,7 @@
             <a:blip r:embed="rId16">
               <a:extLst>
                 <a:ext uri="{96DAC541-7B7A-43D3-8B79-37D633B846F1}">
-                  <ns0:svgBlip xmlns:ns0="http://schemas.microsoft.com/office/drawing/2016/SVG/main" r:embed="rId15"/>
+                  <ns0:svgBlip xmlns:ns0="http://schemas.microsoft.com/office/drawing/2016/SVG/main" r:embed="rId31"/>
                 </a:ext>
               </a:extLst>
             </a:blip>
@@ -11935,7 +11935,7 @@
             <a:blip r:embed="rId18">
               <a:extLst>
                 <a:ext uri="{96DAC541-7B7A-43D3-8B79-37D633B846F1}">
-                  <ns1:svgBlip xmlns:ns1="http://schemas.microsoft.com/office/drawing/2016/SVG/main" r:embed="rId14"/>
+                  <ns1:svgBlip xmlns:ns1="http://schemas.microsoft.com/office/drawing/2016/SVG/main" r:embed="rId32"/>
                 </a:ext>
               </a:extLst>
             </a:blip>
@@ -12110,7 +12110,7 @@
             <a:blip r:embed="rId20">
               <a:extLst>
                 <a:ext uri="{96DAC541-7B7A-43D3-8B79-37D633B846F1}">
-                  <ns2:svgBlip xmlns:ns2="http://schemas.microsoft.com/office/drawing/2016/SVG/main" r:embed="rId13"/>
+                  <ns2:svgBlip xmlns:ns2="http://schemas.microsoft.com/office/drawing/2016/SVG/main" r:embed="rId33"/>
                 </a:ext>
               </a:extLst>
             </a:blip>
@@ -12287,7 +12287,7 @@
             <a:blip r:embed="rId22">
               <a:extLst>
                 <a:ext uri="{96DAC541-7B7A-43D3-8B79-37D633B846F1}">
-                  <ns3:svgBlip xmlns:ns3="http://schemas.microsoft.com/office/drawing/2016/SVG/main" r:embed="rId12"/>
+                  <ns3:svgBlip xmlns:ns3="http://schemas.microsoft.com/office/drawing/2016/SVG/main" r:embed="rId29"/>
                 </a:ext>
               </a:extLst>
             </a:blip>
@@ -12526,7 +12526,7 @@
             <a:blip r:embed="rId24">
               <a:extLst>
                 <a:ext uri="{96DAC541-7B7A-43D3-8B79-37D633B846F1}">
-                  <ns4:svgBlip xmlns:ns4="http://schemas.microsoft.com/office/drawing/2016/SVG/main" r:embed="rId11"/>
+                  <ns4:svgBlip xmlns:ns4="http://schemas.microsoft.com/office/drawing/2016/SVG/main" r:embed="rId35"/>
                 </a:ext>
               </a:extLst>
             </a:blip>
@@ -12653,7 +12653,7 @@
             <a:blip r:embed="rId26">
               <a:extLst>
                 <a:ext uri="{96DAC541-7B7A-43D3-8B79-37D633B846F1}">
-                  <ns5:svgBlip xmlns:ns5="http://schemas.microsoft.com/office/drawing/2016/SVG/main" r:embed="rId10"/>
+                  <ns5:svgBlip xmlns:ns5="http://schemas.microsoft.com/office/drawing/2016/SVG/main" r:embed="rId28"/>
                 </a:ext>
               </a:extLst>
             </a:blip>
@@ -12832,7 +12832,7 @@
             <a:blip r:embed="rId9">
               <a:extLst>
                 <a:ext uri="{96DAC541-7B7A-43D3-8B79-37D633B846F1}">
-                  <ns6:svgBlip xmlns:ns6="http://schemas.microsoft.com/office/drawing/2016/SVG/main" r:embed="rId8"/>
+                  <ns6:svgBlip xmlns:ns6="http://schemas.microsoft.com/office/drawing/2016/SVG/main" r:embed="rId37"/>
                 </a:ext>
               </a:extLst>
             </a:blip>
@@ -13011,7 +13011,7 @@
             <a:blip r:embed="rId30">
               <a:extLst>
                 <a:ext uri="{96DAC541-7B7A-43D3-8B79-37D633B846F1}">
-                  <ns7:svgBlip xmlns:ns7="http://schemas.microsoft.com/office/drawing/2016/SVG/main" r:embed="rId7"/>
+                  <ns7:svgBlip xmlns:ns7="http://schemas.microsoft.com/office/drawing/2016/SVG/main" r:embed="rId27"/>
                 </a:ext>
               </a:extLst>
             </a:blip>
@@ -13189,10 +13189,10 @@
             <p:nvPr/>
           </p:nvPicPr>
           <p:blipFill>
-            <a:blip r:embed="rId6">
+            <a:blip r:embed="rId39">
               <a:extLst>
                 <a:ext uri="{96DAC541-7B7A-43D3-8B79-37D633B846F1}">
-                  <ns8:svgBlip xmlns:ns8="http://schemas.microsoft.com/office/drawing/2016/SVG/main" r:embed="rId5"/>
+                  <ns8:svgBlip xmlns:ns8="http://schemas.microsoft.com/office/drawing/2016/SVG/main" r:embed="rId25"/>
                 </a:ext>
               </a:extLst>
             </a:blip>
@@ -13381,7 +13381,7 @@
             <a:blip r:embed="rId34">
               <a:extLst>
                 <a:ext uri="{96DAC541-7B7A-43D3-8B79-37D633B846F1}">
-                  <ns9:svgBlip xmlns:ns9="http://schemas.microsoft.com/office/drawing/2016/SVG/main" r:embed="rId4"/>
+                  <ns9:svgBlip xmlns:ns9="http://schemas.microsoft.com/office/drawing/2016/SVG/main" r:embed="rId41"/>
                 </a:ext>
               </a:extLst>
             </a:blip>
@@ -13561,10 +13561,10 @@
             <p:nvPr/>
           </p:nvPicPr>
           <p:blipFill>
-            <a:blip r:embed="rId6">
+            <a:blip r:embed="rId39">
               <a:extLst>
                 <a:ext uri="{96DAC541-7B7A-43D3-8B79-37D633B846F1}">
-                  <ns10:svgBlip xmlns:ns10="http://schemas.microsoft.com/office/drawing/2016/SVG/main" r:embed="rId5"/>
+                  <ns10:svgBlip xmlns:ns10="http://schemas.microsoft.com/office/drawing/2016/SVG/main" r:embed="rId25"/>
                 </a:ext>
               </a:extLst>
             </a:blip>
@@ -13743,7 +13743,7 @@
             <a:blip r:embed="rId36">
               <a:extLst>
                 <a:ext uri="{96DAC541-7B7A-43D3-8B79-37D633B846F1}">
-                  <ns11:svgBlip xmlns:ns11="http://schemas.microsoft.com/office/drawing/2016/SVG/main" r:embed="rId3"/>
+                  <ns11:svgBlip xmlns:ns11="http://schemas.microsoft.com/office/drawing/2016/SVG/main" r:embed="rId23"/>
                 </a:ext>
               </a:extLst>
             </a:blip>
@@ -13924,7 +13924,7 @@
             <a:blip r:embed="rId26">
               <a:extLst>
                 <a:ext uri="{96DAC541-7B7A-43D3-8B79-37D633B846F1}">
-                  <ns12:svgBlip xmlns:ns12="http://schemas.microsoft.com/office/drawing/2016/SVG/main" r:embed="rId10"/>
+                  <ns12:svgBlip xmlns:ns12="http://schemas.microsoft.com/office/drawing/2016/SVG/main" r:embed="rId28"/>
                 </a:ext>
               </a:extLst>
             </a:blip>
@@ -14111,7 +14111,7 @@
             <a:blip r:embed="rId42">
               <a:extLst>
                 <a:ext uri="{96DAC541-7B7A-43D3-8B79-37D633B846F1}">
-                  <ns15:svgBlip xmlns:ns15="http://schemas.microsoft.com/office/drawing/2016/SVG/main" r:embed="rId46"/>
+                  <ns15:svgBlip xmlns:ns15="http://schemas.microsoft.com/office/drawing/2016/SVG/main" r:embed="rId19"/>
                 </a:ext>
               </a:extLst>
             </a:blip>
@@ -15317,7 +15317,7 @@
             <a:blip r:embed="rId16">
               <a:extLst>
                 <a:ext uri="{96DAC541-7B7A-43D3-8B79-37D633B846F1}">
-                  <ns0:svgBlip xmlns:ns0="http://schemas.microsoft.com/office/drawing/2016/SVG/main" r:embed="rId15"/>
+                  <ns0:svgBlip xmlns:ns0="http://schemas.microsoft.com/office/drawing/2016/SVG/main" r:embed="rId31"/>
                 </a:ext>
               </a:extLst>
             </a:blip>
@@ -15446,7 +15446,7 @@
             <a:blip r:embed="rId18">
               <a:extLst>
                 <a:ext uri="{96DAC541-7B7A-43D3-8B79-37D633B846F1}">
-                  <ns1:svgBlip xmlns:ns1="http://schemas.microsoft.com/office/drawing/2016/SVG/main" r:embed="rId14"/>
+                  <ns1:svgBlip xmlns:ns1="http://schemas.microsoft.com/office/drawing/2016/SVG/main" r:embed="rId32"/>
                 </a:ext>
               </a:extLst>
             </a:blip>
@@ -15621,7 +15621,7 @@
             <a:blip r:embed="rId20">
               <a:extLst>
                 <a:ext uri="{96DAC541-7B7A-43D3-8B79-37D633B846F1}">
-                  <ns2:svgBlip xmlns:ns2="http://schemas.microsoft.com/office/drawing/2016/SVG/main" r:embed="rId13"/>
+                  <ns2:svgBlip xmlns:ns2="http://schemas.microsoft.com/office/drawing/2016/SVG/main" r:embed="rId33"/>
                 </a:ext>
               </a:extLst>
             </a:blip>
@@ -15798,7 +15798,7 @@
             <a:blip r:embed="rId22">
               <a:extLst>
                 <a:ext uri="{96DAC541-7B7A-43D3-8B79-37D633B846F1}">
-                  <ns3:svgBlip xmlns:ns3="http://schemas.microsoft.com/office/drawing/2016/SVG/main" r:embed="rId12"/>
+                  <ns3:svgBlip xmlns:ns3="http://schemas.microsoft.com/office/drawing/2016/SVG/main" r:embed="rId29"/>
                 </a:ext>
               </a:extLst>
             </a:blip>
@@ -16037,7 +16037,7 @@
             <a:blip r:embed="rId24">
               <a:extLst>
                 <a:ext uri="{96DAC541-7B7A-43D3-8B79-37D633B846F1}">
-                  <ns4:svgBlip xmlns:ns4="http://schemas.microsoft.com/office/drawing/2016/SVG/main" r:embed="rId11"/>
+                  <ns4:svgBlip xmlns:ns4="http://schemas.microsoft.com/office/drawing/2016/SVG/main" r:embed="rId35"/>
                 </a:ext>
               </a:extLst>
             </a:blip>
@@ -16164,7 +16164,7 @@
             <a:blip r:embed="rId26">
               <a:extLst>
                 <a:ext uri="{96DAC541-7B7A-43D3-8B79-37D633B846F1}">
-                  <ns5:svgBlip xmlns:ns5="http://schemas.microsoft.com/office/drawing/2016/SVG/main" r:embed="rId10"/>
+                  <ns5:svgBlip xmlns:ns5="http://schemas.microsoft.com/office/drawing/2016/SVG/main" r:embed="rId28"/>
                 </a:ext>
               </a:extLst>
             </a:blip>
@@ -16343,7 +16343,7 @@
             <a:blip r:embed="rId9">
               <a:extLst>
                 <a:ext uri="{96DAC541-7B7A-43D3-8B79-37D633B846F1}">
-                  <ns6:svgBlip xmlns:ns6="http://schemas.microsoft.com/office/drawing/2016/SVG/main" r:embed="rId8"/>
+                  <ns6:svgBlip xmlns:ns6="http://schemas.microsoft.com/office/drawing/2016/SVG/main" r:embed="rId37"/>
                 </a:ext>
               </a:extLst>
             </a:blip>
@@ -16522,7 +16522,7 @@
             <a:blip r:embed="rId30">
               <a:extLst>
                 <a:ext uri="{96DAC541-7B7A-43D3-8B79-37D633B846F1}">
-                  <ns7:svgBlip xmlns:ns7="http://schemas.microsoft.com/office/drawing/2016/SVG/main" r:embed="rId7"/>
+                  <ns7:svgBlip xmlns:ns7="http://schemas.microsoft.com/office/drawing/2016/SVG/main" r:embed="rId27"/>
                 </a:ext>
               </a:extLst>
             </a:blip>
@@ -16700,10 +16700,10 @@
             <p:nvPr/>
           </p:nvPicPr>
           <p:blipFill>
-            <a:blip r:embed="rId6">
+            <a:blip r:embed="rId39">
               <a:extLst>
                 <a:ext uri="{96DAC541-7B7A-43D3-8B79-37D633B846F1}">
-                  <ns8:svgBlip xmlns:ns8="http://schemas.microsoft.com/office/drawing/2016/SVG/main" r:embed="rId5"/>
+                  <ns8:svgBlip xmlns:ns8="http://schemas.microsoft.com/office/drawing/2016/SVG/main" r:embed="rId25"/>
                 </a:ext>
               </a:extLst>
             </a:blip>
@@ -16892,7 +16892,7 @@
             <a:blip r:embed="rId34">
               <a:extLst>
                 <a:ext uri="{96DAC541-7B7A-43D3-8B79-37D633B846F1}">
-                  <ns9:svgBlip xmlns:ns9="http://schemas.microsoft.com/office/drawing/2016/SVG/main" r:embed="rId4"/>
+                  <ns9:svgBlip xmlns:ns9="http://schemas.microsoft.com/office/drawing/2016/SVG/main" r:embed="rId41"/>
                 </a:ext>
               </a:extLst>
             </a:blip>
@@ -17072,10 +17072,10 @@
             <p:nvPr/>
           </p:nvPicPr>
           <p:blipFill>
-            <a:blip r:embed="rId6">
+            <a:blip r:embed="rId39">
               <a:extLst>
                 <a:ext uri="{96DAC541-7B7A-43D3-8B79-37D633B846F1}">
-                  <ns10:svgBlip xmlns:ns10="http://schemas.microsoft.com/office/drawing/2016/SVG/main" r:embed="rId5"/>
+                  <ns10:svgBlip xmlns:ns10="http://schemas.microsoft.com/office/drawing/2016/SVG/main" r:embed="rId25"/>
                 </a:ext>
               </a:extLst>
             </a:blip>
@@ -17254,7 +17254,7 @@
             <a:blip r:embed="rId36">
               <a:extLst>
                 <a:ext uri="{96DAC541-7B7A-43D3-8B79-37D633B846F1}">
-                  <ns11:svgBlip xmlns:ns11="http://schemas.microsoft.com/office/drawing/2016/SVG/main" r:embed="rId3"/>
+                  <ns11:svgBlip xmlns:ns11="http://schemas.microsoft.com/office/drawing/2016/SVG/main" r:embed="rId23"/>
                 </a:ext>
               </a:extLst>
             </a:blip>
@@ -17435,7 +17435,7 @@
             <a:blip r:embed="rId26">
               <a:extLst>
                 <a:ext uri="{96DAC541-7B7A-43D3-8B79-37D633B846F1}">
-                  <ns12:svgBlip xmlns:ns12="http://schemas.microsoft.com/office/drawing/2016/SVG/main" r:embed="rId10"/>
+                  <ns12:svgBlip xmlns:ns12="http://schemas.microsoft.com/office/drawing/2016/SVG/main" r:embed="rId28"/>
                 </a:ext>
               </a:extLst>
             </a:blip>
@@ -17622,7 +17622,7 @@
             <a:blip r:embed="rId38">
               <a:extLst>
                 <a:ext uri="{96DAC541-7B7A-43D3-8B79-37D633B846F1}">
-                  <ns13:svgBlip xmlns:ns13="http://schemas.microsoft.com/office/drawing/2016/SVG/main" r:embed="rId44"/>
+                  <ns13:svgBlip xmlns:ns13="http://schemas.microsoft.com/office/drawing/2016/SVG/main" r:embed="rId43"/>
                 </a:ext>
               </a:extLst>
             </a:blip>
@@ -17809,7 +17809,7 @@
             <a:blip r:embed="rId40">
               <a:extLst>
                 <a:ext uri="{96DAC541-7B7A-43D3-8B79-37D633B846F1}">
-                  <ns14:svgBlip xmlns:ns14="http://schemas.microsoft.com/office/drawing/2016/SVG/main" r:embed="rId45"/>
+                  <ns14:svgBlip xmlns:ns14="http://schemas.microsoft.com/office/drawing/2016/SVG/main" r:embed="rId21"/>
                 </a:ext>
               </a:extLst>
             </a:blip>
@@ -17998,7 +17998,7 @@
             <a:blip r:embed="rId42">
               <a:extLst>
                 <a:ext uri="{96DAC541-7B7A-43D3-8B79-37D633B846F1}">
-                  <ns15:svgBlip xmlns:ns15="http://schemas.microsoft.com/office/drawing/2016/SVG/main" r:embed="rId46"/>
+                  <ns15:svgBlip xmlns:ns15="http://schemas.microsoft.com/office/drawing/2016/SVG/main" r:embed="rId19"/>
                 </a:ext>
               </a:extLst>
             </a:blip>

--- a/RAG_Workshop_Fokusfolien.pptx
+++ b/RAG_Workshop_Fokusfolien.pptx
@@ -1436,36 +1436,6 @@
 </p:sldLayout>
 </file>
 
-<file path=ppt/slideLayouts/slideLayout11.xml><?xml version="1.0" encoding="utf-8"?>
-<p:sldLayout xmlns:a="http://schemas.openxmlformats.org/drawingml/2006/main" xmlns:r="http://schemas.openxmlformats.org/officeDocument/2006/relationships" xmlns:p="http://schemas.openxmlformats.org/presentationml/2006/main" type="title">
-  <p:cSld name="Title Slide">
-    <p:spTree>
-      <p:nvGrpSpPr>
-        <p:cNvPr id="1" name=""/>
-        <p:cNvGrpSpPr/>
-        <p:nvPr/>
-      </p:nvGrpSpPr>
-      <p:grpSpPr>
-        <a:xfrm>
-          <a:off x="0" y="0"/>
-          <a:ext cx="0" cy="0"/>
-          <a:chOff x="0" y="0"/>
-          <a:chExt cx="0" cy="0"/>
-        </a:xfrm>
-      </p:grpSpPr>
-    </p:spTree>
-    <p:extLst>
-      <p:ext uri="{BB962C8B-B14F-4D97-AF65-F5344CB8AC3E}">
-        <p14:creationId xmlns:p14="http://schemas.microsoft.com/office/powerpoint/2010/main" val="3637233680"/>
-      </p:ext>
-    </p:extLst>
-  </p:cSld>
-  <p:clrMapOvr>
-    <a:masterClrMapping/>
-  </p:clrMapOvr>
-</p:sldLayout>
-</file>
-
 <file path=ppt/slideLayouts/slideLayout2.xml><?xml version="1.0" encoding="utf-8"?>
 <p:sldLayout xmlns:a="http://schemas.openxmlformats.org/drawingml/2006/main" xmlns:r="http://schemas.openxmlformats.org/officeDocument/2006/relationships" xmlns:p="http://schemas.openxmlformats.org/presentationml/2006/main" showMasterSp="0" preserve="1" userDrawn="1">
   <p:cSld name="Titelfolie mit Bild">
@@ -3835,7 +3805,6 @@
     <p:sldLayoutId id="2147483668" r:id="rId8"/>
     <p:sldLayoutId id="2147483654" r:id="rId9"/>
     <p:sldLayoutId id="2147483666" r:id="rId10"/>
-    <p:sldLayoutId id="2147483669" r:id="rId11"/>
   </p:sldLayoutIdLst>
   <p:hf hdr="0" ftr="0"/>
   <p:txStyles>
@@ -4319,9 +4288,9 @@
           <p:nvPr/>
         </p:nvCxnSpPr>
         <p:spPr>
-          <a:xfrm flipV="1">
-            <a:off x="9180000" y="5461803"/>
-            <a:ext cx="360000" cy="9525"/>
+          <a:xfrm>
+            <a:off x="9180000" y="5473800"/>
+            <a:ext cx="360000" cy="0"/>
           </a:xfrm>
           <a:prstGeom prst="straightConnector1">
             <a:avLst/>
@@ -4359,7 +4328,7 @@
         </p:nvGrpSpPr>
         <p:grpSpPr>
           <a:xfrm>
-            <a:off x="9540000" y="1449525"/>
+            <a:off x="9540000" y="1440000"/>
             <a:ext cx="1440000" cy="867600"/>
             <a:chOff x="10196840" y="1570799"/>
             <a:chExt cx="1440000" cy="867600"/>
@@ -4534,7 +4503,7 @@
         </p:nvGrpSpPr>
         <p:grpSpPr>
           <a:xfrm>
-            <a:off x="9540000" y="5028003"/>
+            <a:off x="9540000" y="5040000"/>
             <a:ext cx="1440000" cy="867600"/>
             <a:chOff x="10196840" y="5161353"/>
             <a:chExt cx="1440000" cy="867600"/>
@@ -4715,7 +4684,7 @@
         </p:nvGrpSpPr>
         <p:grpSpPr>
           <a:xfrm>
-            <a:off x="7740000" y="5037528"/>
+            <a:off x="7740000" y="5040000"/>
             <a:ext cx="1440000" cy="867600"/>
             <a:chOff x="8006090" y="5161353"/>
             <a:chExt cx="1440000" cy="867600"/>
@@ -4902,8 +4871,8 @@
         </p:nvCxnSpPr>
         <p:spPr>
           <a:xfrm flipH="1">
-            <a:off x="8460000" y="2317125"/>
-            <a:ext cx="1800000" cy="2720403"/>
+            <a:off x="8460000" y="2307600"/>
+            <a:ext cx="1800000" cy="2732400"/>
           </a:xfrm>
           <a:prstGeom prst="straightConnector1">
             <a:avLst/>
@@ -4941,7 +4910,7 @@
         </p:nvSpPr>
         <p:spPr>
           <a:xfrm>
-            <a:off x="7696800" y="4994328"/>
+            <a:off x="7696800" y="4996800"/>
             <a:ext cx="1526400" cy="954000"/>
           </a:xfrm>
           <a:prstGeom prst="roundRect">
@@ -4969,7 +4938,7 @@
         </p:nvSpPr>
         <p:spPr>
           <a:xfrm>
-            <a:off x="9496800" y="1406325"/>
+            <a:off x="9496800" y="1396800"/>
             <a:ext cx="1526400" cy="954000"/>
           </a:xfrm>
           <a:prstGeom prst="roundRect">
@@ -4997,7 +4966,7 @@
         </p:nvSpPr>
         <p:spPr>
           <a:xfrm>
-            <a:off x="9496800" y="4984803"/>
+            <a:off x="9496800" y="4996800"/>
             <a:ext cx="1526400" cy="954000"/>
           </a:xfrm>
           <a:prstGeom prst="roundRect">
@@ -5129,8 +5098,8 @@
         </p:nvCxnSpPr>
         <p:spPr>
           <a:xfrm flipV="1">
-            <a:off x="1260000" y="3505199"/>
-            <a:ext cx="0" cy="323025"/>
+            <a:off x="1260000" y="3567600"/>
+            <a:ext cx="0" cy="212400"/>
           </a:xfrm>
           <a:prstGeom prst="straightConnector1">
             <a:avLst/>
@@ -5178,8 +5147,8 @@
         </p:nvCxnSpPr>
         <p:spPr>
           <a:xfrm flipV="1">
-            <a:off x="1260000" y="2314574"/>
-            <a:ext cx="0" cy="323025"/>
+            <a:off x="1260000" y="2307600"/>
+            <a:ext cx="0" cy="392400"/>
           </a:xfrm>
           <a:prstGeom prst="straightConnector1">
             <a:avLst/>
@@ -5226,9 +5195,9 @@
           <p:nvPr/>
         </p:nvCxnSpPr>
         <p:spPr>
-          <a:xfrm flipV="1">
-            <a:off x="1980000" y="1866221"/>
-            <a:ext cx="2160000" cy="14553"/>
+          <a:xfrm>
+            <a:off x="1980000" y="1873800"/>
+            <a:ext cx="2160000" cy="0"/>
           </a:xfrm>
           <a:prstGeom prst="straightConnector1">
             <a:avLst/>
@@ -5276,8 +5245,8 @@
         </p:nvCxnSpPr>
         <p:spPr>
           <a:xfrm>
-            <a:off x="4860000" y="2300021"/>
-            <a:ext cx="0" cy="336752"/>
+            <a:off x="4860000" y="2307600"/>
+            <a:ext cx="0" cy="392400"/>
           </a:xfrm>
           <a:prstGeom prst="straightConnector1">
             <a:avLst/>
@@ -5324,9 +5293,9 @@
           <p:nvPr/>
         </p:nvCxnSpPr>
         <p:spPr>
-          <a:xfrm flipV="1">
-            <a:off x="9180000" y="5461803"/>
-            <a:ext cx="360000" cy="9525"/>
+          <a:xfrm>
+            <a:off x="9180000" y="5473800"/>
+            <a:ext cx="360000" cy="0"/>
           </a:xfrm>
           <a:prstGeom prst="straightConnector1">
             <a:avLst/>
@@ -5374,8 +5343,8 @@
         </p:nvCxnSpPr>
         <p:spPr>
           <a:xfrm flipV="1">
-            <a:off x="1260000" y="4695824"/>
-            <a:ext cx="0" cy="323025"/>
+            <a:off x="1260000" y="4647600"/>
+            <a:ext cx="0" cy="392400"/>
           </a:xfrm>
           <a:prstGeom prst="straightConnector1">
             <a:avLst/>
@@ -5423,8 +5392,8 @@
         </p:nvCxnSpPr>
         <p:spPr>
           <a:xfrm>
-            <a:off x="5580000" y="3070573"/>
-            <a:ext cx="360000" cy="826"/>
+            <a:off x="5580000" y="3133800"/>
+            <a:ext cx="360000" cy="0"/>
           </a:xfrm>
           <a:prstGeom prst="straightConnector1">
             <a:avLst/>
@@ -5462,7 +5431,7 @@
         </p:nvGrpSpPr>
         <p:grpSpPr>
           <a:xfrm>
-            <a:off x="540000" y="5018849"/>
+            <a:off x="540000" y="5040000"/>
             <a:ext cx="1440000" cy="867600"/>
             <a:chOff x="624215" y="5142674"/>
             <a:chExt cx="1440000" cy="867600"/>
@@ -5639,7 +5608,7 @@
         </p:nvGrpSpPr>
         <p:grpSpPr>
           <a:xfrm>
-            <a:off x="9540000" y="1449525"/>
+            <a:off x="9540000" y="1440000"/>
             <a:ext cx="1440000" cy="867600"/>
             <a:chOff x="10196840" y="1570799"/>
             <a:chExt cx="1440000" cy="867600"/>
@@ -5814,7 +5783,7 @@
         </p:nvGrpSpPr>
         <p:grpSpPr>
           <a:xfrm>
-            <a:off x="9540000" y="5028003"/>
+            <a:off x="9540000" y="5040000"/>
             <a:ext cx="1440000" cy="867600"/>
             <a:chOff x="10196840" y="5161353"/>
             <a:chExt cx="1440000" cy="867600"/>
@@ -5989,7 +5958,7 @@
         </p:nvGrpSpPr>
         <p:grpSpPr>
           <a:xfrm>
-            <a:off x="540000" y="3828224"/>
+            <a:off x="540000" y="3780000"/>
             <a:ext cx="1440000" cy="867600"/>
             <a:chOff x="622908" y="3952049"/>
             <a:chExt cx="1440000" cy="867600"/>
@@ -6178,7 +6147,7 @@
         </p:nvGrpSpPr>
         <p:grpSpPr>
           <a:xfrm>
-            <a:off x="540000" y="2637599"/>
+            <a:off x="540000" y="2700000"/>
             <a:ext cx="1440000" cy="867600"/>
             <a:chOff x="624215" y="2761424"/>
             <a:chExt cx="1440000" cy="867600"/>
@@ -6359,7 +6328,7 @@
         </p:nvGrpSpPr>
         <p:grpSpPr>
           <a:xfrm>
-            <a:off x="4140000" y="2636773"/>
+            <a:off x="4140000" y="2700000"/>
             <a:ext cx="1440000" cy="867600"/>
             <a:chOff x="5009244" y="1578083"/>
             <a:chExt cx="1440000" cy="867600"/>
@@ -6536,7 +6505,7 @@
         </p:nvGrpSpPr>
         <p:grpSpPr>
           <a:xfrm>
-            <a:off x="5940000" y="2637599"/>
+            <a:off x="5940000" y="2700000"/>
             <a:ext cx="1440000" cy="867600"/>
             <a:chOff x="5005715" y="2776165"/>
             <a:chExt cx="1440000" cy="867600"/>
@@ -6723,7 +6692,7 @@
         </p:nvGrpSpPr>
         <p:grpSpPr>
           <a:xfrm>
-            <a:off x="7740000" y="5037528"/>
+            <a:off x="7740000" y="5040000"/>
             <a:ext cx="1440000" cy="867600"/>
             <a:chOff x="8006090" y="5161353"/>
             <a:chExt cx="1440000" cy="867600"/>
@@ -6906,7 +6875,7 @@
         </p:nvGrpSpPr>
         <p:grpSpPr>
           <a:xfrm>
-            <a:off x="4140000" y="1432421"/>
+            <a:off x="4140000" y="1440000"/>
             <a:ext cx="1440000" cy="867600"/>
             <a:chOff x="2783916" y="1570799"/>
             <a:chExt cx="1440000" cy="867600"/>
@@ -7089,7 +7058,7 @@
         </p:nvGrpSpPr>
         <p:grpSpPr>
           <a:xfrm>
-            <a:off x="540000" y="1446974"/>
+            <a:off x="540000" y="1440000"/>
             <a:ext cx="1440000" cy="867600"/>
             <a:chOff x="617904" y="1570799"/>
             <a:chExt cx="1440000" cy="867600"/>
@@ -7270,8 +7239,8 @@
         </p:nvCxnSpPr>
         <p:spPr>
           <a:xfrm flipH="1">
-            <a:off x="8460000" y="2317125"/>
-            <a:ext cx="1800000" cy="2720403"/>
+            <a:off x="8460000" y="2307600"/>
+            <a:ext cx="1800000" cy="2732400"/>
           </a:xfrm>
           <a:prstGeom prst="straightConnector1">
             <a:avLst/>
@@ -7309,7 +7278,7 @@
         </p:nvSpPr>
         <p:spPr>
           <a:xfrm>
-            <a:off x="496800" y="2594399"/>
+            <a:off x="496800" y="2656800"/>
             <a:ext cx="1526400" cy="954000"/>
           </a:xfrm>
           <a:prstGeom prst="roundRect">
@@ -7337,7 +7306,7 @@
         </p:nvSpPr>
         <p:spPr>
           <a:xfrm>
-            <a:off x="496800" y="1403774"/>
+            <a:off x="496800" y="1396800"/>
             <a:ext cx="1526400" cy="954000"/>
           </a:xfrm>
           <a:prstGeom prst="roundRect">
@@ -7365,7 +7334,7 @@
         </p:nvSpPr>
         <p:spPr>
           <a:xfrm>
-            <a:off x="4096800" y="1389221"/>
+            <a:off x="4096800" y="1396800"/>
             <a:ext cx="1526400" cy="954000"/>
           </a:xfrm>
           <a:prstGeom prst="roundRect">
@@ -7393,7 +7362,7 @@
         </p:nvSpPr>
         <p:spPr>
           <a:xfrm>
-            <a:off x="4096800" y="2593573"/>
+            <a:off x="4096800" y="2656800"/>
             <a:ext cx="1526400" cy="954000"/>
           </a:xfrm>
           <a:prstGeom prst="roundRect">
@@ -7421,7 +7390,7 @@
         </p:nvSpPr>
         <p:spPr>
           <a:xfrm>
-            <a:off x="496800" y="3785024"/>
+            <a:off x="496800" y="3736800"/>
             <a:ext cx="1526400" cy="954000"/>
           </a:xfrm>
           <a:prstGeom prst="roundRect">
@@ -7449,7 +7418,7 @@
         </p:nvSpPr>
         <p:spPr>
           <a:xfrm>
-            <a:off x="496800" y="4975649"/>
+            <a:off x="496800" y="4996800"/>
             <a:ext cx="1526400" cy="954000"/>
           </a:xfrm>
           <a:prstGeom prst="roundRect">
@@ -7477,7 +7446,7 @@
         </p:nvSpPr>
         <p:spPr>
           <a:xfrm>
-            <a:off x="5896800" y="2594399"/>
+            <a:off x="5896800" y="2656800"/>
             <a:ext cx="1526400" cy="954000"/>
           </a:xfrm>
           <a:prstGeom prst="roundRect">
@@ -7609,8 +7578,8 @@
         </p:nvCxnSpPr>
         <p:spPr>
           <a:xfrm flipV="1">
-            <a:off x="1260000" y="3505199"/>
-            <a:ext cx="0" cy="323025"/>
+            <a:off x="1260000" y="3567600"/>
+            <a:ext cx="0" cy="212400"/>
           </a:xfrm>
           <a:prstGeom prst="straightConnector1">
             <a:avLst/>
@@ -7658,8 +7627,8 @@
         </p:nvCxnSpPr>
         <p:spPr>
           <a:xfrm flipV="1">
-            <a:off x="1260000" y="2314574"/>
-            <a:ext cx="0" cy="323025"/>
+            <a:off x="1260000" y="2307600"/>
+            <a:ext cx="0" cy="392400"/>
           </a:xfrm>
           <a:prstGeom prst="straightConnector1">
             <a:avLst/>
@@ -7707,7 +7676,7 @@
         </p:nvCxnSpPr>
         <p:spPr>
           <a:xfrm>
-            <a:off x="7380000" y="5471328"/>
+            <a:off x="7380000" y="5473800"/>
             <a:ext cx="360000" cy="0"/>
           </a:xfrm>
           <a:prstGeom prst="straightConnector1">
@@ -7756,7 +7725,7 @@
         </p:nvCxnSpPr>
         <p:spPr>
           <a:xfrm flipH="1">
-            <a:off x="7380000" y="3071399"/>
+            <a:off x="7380000" y="3133800"/>
             <a:ext cx="360000" cy="0"/>
           </a:xfrm>
           <a:prstGeom prst="straightConnector1">
@@ -7804,9 +7773,9 @@
           <p:nvPr/>
         </p:nvCxnSpPr>
         <p:spPr>
-          <a:xfrm flipV="1">
-            <a:off x="1980000" y="1866221"/>
-            <a:ext cx="2160000" cy="14553"/>
+          <a:xfrm>
+            <a:off x="1980000" y="1873800"/>
+            <a:ext cx="2160000" cy="0"/>
           </a:xfrm>
           <a:prstGeom prst="straightConnector1">
             <a:avLst/>
@@ -7854,8 +7823,8 @@
         </p:nvCxnSpPr>
         <p:spPr>
           <a:xfrm>
-            <a:off x="4860000" y="2300021"/>
-            <a:ext cx="0" cy="336752"/>
+            <a:off x="4860000" y="2307600"/>
+            <a:ext cx="0" cy="392400"/>
           </a:xfrm>
           <a:prstGeom prst="straightConnector1">
             <a:avLst/>
@@ -7902,9 +7871,9 @@
           <p:nvPr/>
         </p:nvCxnSpPr>
         <p:spPr>
-          <a:xfrm flipV="1">
-            <a:off x="9180000" y="5461803"/>
-            <a:ext cx="360000" cy="9525"/>
+          <a:xfrm>
+            <a:off x="9180000" y="5473800"/>
+            <a:ext cx="360000" cy="0"/>
           </a:xfrm>
           <a:prstGeom prst="straightConnector1">
             <a:avLst/>
@@ -7952,8 +7921,8 @@
         </p:nvCxnSpPr>
         <p:spPr>
           <a:xfrm flipV="1">
-            <a:off x="1260000" y="4695824"/>
-            <a:ext cx="0" cy="323025"/>
+            <a:off x="1260000" y="4647600"/>
+            <a:ext cx="0" cy="392400"/>
           </a:xfrm>
           <a:prstGeom prst="straightConnector1">
             <a:avLst/>
@@ -8000,9 +7969,9 @@
           <p:nvPr/>
         </p:nvCxnSpPr>
         <p:spPr>
-          <a:xfrm flipH="1" flipV="1">
-            <a:off x="9180000" y="1880774"/>
-            <a:ext cx="360000" cy="2551"/>
+          <a:xfrm flipH="1">
+            <a:off x="9180000" y="1873800"/>
+            <a:ext cx="360000" cy="0"/>
           </a:xfrm>
           <a:prstGeom prst="straightConnector1">
             <a:avLst/>
@@ -8050,8 +8019,8 @@
         </p:nvCxnSpPr>
         <p:spPr>
           <a:xfrm>
-            <a:off x="8460000" y="2314574"/>
-            <a:ext cx="0" cy="323025"/>
+            <a:off x="8460000" y="2307600"/>
+            <a:ext cx="0" cy="392400"/>
           </a:xfrm>
           <a:prstGeom prst="straightConnector1">
             <a:avLst/>
@@ -8099,8 +8068,8 @@
         </p:nvCxnSpPr>
         <p:spPr>
           <a:xfrm>
-            <a:off x="5580000" y="3070573"/>
-            <a:ext cx="360000" cy="826"/>
+            <a:off x="5580000" y="3133800"/>
+            <a:ext cx="360000" cy="0"/>
           </a:xfrm>
           <a:prstGeom prst="straightConnector1">
             <a:avLst/>
@@ -8148,8 +8117,8 @@
         </p:nvCxnSpPr>
         <p:spPr>
           <a:xfrm>
-            <a:off x="6660000" y="3505199"/>
-            <a:ext cx="0" cy="323025"/>
+            <a:off x="6660000" y="3567600"/>
+            <a:ext cx="0" cy="212400"/>
           </a:xfrm>
           <a:prstGeom prst="straightConnector1">
             <a:avLst/>
@@ -8197,8 +8166,8 @@
         </p:nvCxnSpPr>
         <p:spPr>
           <a:xfrm>
-            <a:off x="6660000" y="4695824"/>
-            <a:ext cx="0" cy="341704"/>
+            <a:off x="6660000" y="4647600"/>
+            <a:ext cx="0" cy="392400"/>
           </a:xfrm>
           <a:prstGeom prst="straightConnector1">
             <a:avLst/>
@@ -8236,7 +8205,7 @@
         </p:nvGrpSpPr>
         <p:grpSpPr>
           <a:xfrm>
-            <a:off x="540000" y="5018849"/>
+            <a:off x="540000" y="5040000"/>
             <a:ext cx="1440000" cy="867600"/>
             <a:chOff x="624215" y="5142674"/>
             <a:chExt cx="1440000" cy="867600"/>
@@ -8413,7 +8382,7 @@
         </p:nvGrpSpPr>
         <p:grpSpPr>
           <a:xfrm>
-            <a:off x="9540000" y="1449525"/>
+            <a:off x="9540000" y="1440000"/>
             <a:ext cx="1440000" cy="867600"/>
             <a:chOff x="10196840" y="1570799"/>
             <a:chExt cx="1440000" cy="867600"/>
@@ -8588,7 +8557,7 @@
         </p:nvGrpSpPr>
         <p:grpSpPr>
           <a:xfrm>
-            <a:off x="9540000" y="5028003"/>
+            <a:off x="9540000" y="5040000"/>
             <a:ext cx="1440000" cy="867600"/>
             <a:chOff x="10196840" y="5161353"/>
             <a:chExt cx="1440000" cy="867600"/>
@@ -8763,7 +8732,7 @@
         </p:nvGrpSpPr>
         <p:grpSpPr>
           <a:xfrm>
-            <a:off x="540000" y="3828224"/>
+            <a:off x="540000" y="3780000"/>
             <a:ext cx="1440000" cy="867600"/>
             <a:chOff x="622908" y="3952049"/>
             <a:chExt cx="1440000" cy="867600"/>
@@ -8952,7 +8921,7 @@
         </p:nvGrpSpPr>
         <p:grpSpPr>
           <a:xfrm>
-            <a:off x="540000" y="2637599"/>
+            <a:off x="540000" y="2700000"/>
             <a:ext cx="1440000" cy="867600"/>
             <a:chOff x="624215" y="2761424"/>
             <a:chExt cx="1440000" cy="867600"/>
@@ -9133,7 +9102,7 @@
         </p:nvGrpSpPr>
         <p:grpSpPr>
           <a:xfrm>
-            <a:off x="4140000" y="2636773"/>
+            <a:off x="4140000" y="2700000"/>
             <a:ext cx="1440000" cy="867600"/>
             <a:chOff x="5009244" y="1578083"/>
             <a:chExt cx="1440000" cy="867600"/>
@@ -9310,7 +9279,7 @@
         </p:nvGrpSpPr>
         <p:grpSpPr>
           <a:xfrm>
-            <a:off x="5940000" y="2637599"/>
+            <a:off x="5940000" y="2700000"/>
             <a:ext cx="1440000" cy="867600"/>
             <a:chOff x="5005715" y="2776165"/>
             <a:chExt cx="1440000" cy="867600"/>
@@ -9491,7 +9460,7 @@
         </p:nvGrpSpPr>
         <p:grpSpPr>
           <a:xfrm>
-            <a:off x="5940000" y="5037528"/>
+            <a:off x="5940000" y="5040000"/>
             <a:ext cx="1440000" cy="867600"/>
             <a:chOff x="5005715" y="5161353"/>
             <a:chExt cx="1440000" cy="867600"/>
@@ -9668,7 +9637,7 @@
         </p:nvGrpSpPr>
         <p:grpSpPr>
           <a:xfrm>
-            <a:off x="7740000" y="1446974"/>
+            <a:off x="7740000" y="1440000"/>
             <a:ext cx="1440000" cy="867600"/>
             <a:chOff x="7996042" y="1570799"/>
             <a:chExt cx="1440000" cy="867600"/>
@@ -9857,7 +9826,7 @@
         </p:nvGrpSpPr>
         <p:grpSpPr>
           <a:xfrm>
-            <a:off x="7740000" y="5037528"/>
+            <a:off x="7740000" y="5040000"/>
             <a:ext cx="1440000" cy="867600"/>
             <a:chOff x="8006090" y="5161353"/>
             <a:chExt cx="1440000" cy="867600"/>
@@ -10040,7 +10009,7 @@
         </p:nvGrpSpPr>
         <p:grpSpPr>
           <a:xfrm>
-            <a:off x="4140000" y="1432421"/>
+            <a:off x="4140000" y="1440000"/>
             <a:ext cx="1440000" cy="867600"/>
             <a:chOff x="2783916" y="1570799"/>
             <a:chExt cx="1440000" cy="867600"/>
@@ -10223,7 +10192,7 @@
         </p:nvGrpSpPr>
         <p:grpSpPr>
           <a:xfrm>
-            <a:off x="540000" y="1446974"/>
+            <a:off x="540000" y="1440000"/>
             <a:ext cx="1440000" cy="867600"/>
             <a:chOff x="617904" y="1570799"/>
             <a:chExt cx="1440000" cy="867600"/>
@@ -10406,7 +10375,7 @@
         </p:nvGrpSpPr>
         <p:grpSpPr>
           <a:xfrm>
-            <a:off x="7740000" y="2637599"/>
+            <a:off x="7740000" y="2700000"/>
             <a:ext cx="1440000" cy="867600"/>
             <a:chOff x="8006090" y="2794529"/>
             <a:chExt cx="1440000" cy="867600"/>
@@ -10587,7 +10556,7 @@
         </p:nvGrpSpPr>
         <p:grpSpPr>
           <a:xfrm>
-            <a:off x="5940000" y="3828224"/>
+            <a:off x="5940000" y="3780000"/>
             <a:ext cx="1440000" cy="867600"/>
             <a:chOff x="2783916" y="1570799"/>
             <a:chExt cx="1440000" cy="867600"/>
@@ -10774,8 +10743,8 @@
         </p:nvCxnSpPr>
         <p:spPr>
           <a:xfrm flipH="1">
-            <a:off x="8460000" y="2317125"/>
-            <a:ext cx="1800000" cy="2720403"/>
+            <a:off x="8460000" y="2307600"/>
+            <a:ext cx="1800000" cy="2732400"/>
           </a:xfrm>
           <a:prstGeom prst="straightConnector1">
             <a:avLst/>
@@ -10813,7 +10782,7 @@
         </p:nvSpPr>
         <p:spPr>
           <a:xfrm>
-            <a:off x="7696800" y="1403774"/>
+            <a:off x="7696800" y="1396800"/>
             <a:ext cx="1526400" cy="954000"/>
           </a:xfrm>
           <a:prstGeom prst="roundRect">
@@ -10841,7 +10810,7 @@
         </p:nvSpPr>
         <p:spPr>
           <a:xfrm>
-            <a:off x="7696800" y="2594399"/>
+            <a:off x="7696800" y="2656800"/>
             <a:ext cx="1526400" cy="954000"/>
           </a:xfrm>
           <a:prstGeom prst="roundRect">
@@ -10869,7 +10838,7 @@
         </p:nvSpPr>
         <p:spPr>
           <a:xfrm>
-            <a:off x="5896800" y="3785024"/>
+            <a:off x="5896800" y="3736800"/>
             <a:ext cx="1526400" cy="954000"/>
           </a:xfrm>
           <a:prstGeom prst="roundRect">
@@ -10897,7 +10866,7 @@
         </p:nvSpPr>
         <p:spPr>
           <a:xfrm>
-            <a:off x="5896800" y="4994328"/>
+            <a:off x="5896800" y="4996800"/>
             <a:ext cx="1526400" cy="954000"/>
           </a:xfrm>
           <a:prstGeom prst="roundRect">
@@ -11029,8 +10998,8 @@
         </p:nvCxnSpPr>
         <p:spPr>
           <a:xfrm flipV="1">
-            <a:off x="1260000" y="3505199"/>
-            <a:ext cx="0" cy="323025"/>
+            <a:off x="1260000" y="3567600"/>
+            <a:ext cx="0" cy="212400"/>
           </a:xfrm>
           <a:prstGeom prst="straightConnector1">
             <a:avLst/>
@@ -11078,8 +11047,8 @@
         </p:nvCxnSpPr>
         <p:spPr>
           <a:xfrm flipV="1">
-            <a:off x="1260000" y="2314574"/>
-            <a:ext cx="0" cy="323025"/>
+            <a:off x="1260000" y="2307600"/>
+            <a:ext cx="0" cy="392400"/>
           </a:xfrm>
           <a:prstGeom prst="straightConnector1">
             <a:avLst/>
@@ -11127,7 +11096,7 @@
         </p:nvCxnSpPr>
         <p:spPr>
           <a:xfrm>
-            <a:off x="7380000" y="5471328"/>
+            <a:off x="7380000" y="5473800"/>
             <a:ext cx="360000" cy="0"/>
           </a:xfrm>
           <a:prstGeom prst="straightConnector1">
@@ -11176,7 +11145,7 @@
         </p:nvCxnSpPr>
         <p:spPr>
           <a:xfrm flipH="1">
-            <a:off x="7380000" y="3071399"/>
+            <a:off x="7380000" y="3133800"/>
             <a:ext cx="360000" cy="0"/>
           </a:xfrm>
           <a:prstGeom prst="straightConnector1">
@@ -11224,9 +11193,9 @@
           <p:nvPr/>
         </p:nvCxnSpPr>
         <p:spPr>
-          <a:xfrm flipV="1">
-            <a:off x="1980000" y="1866221"/>
-            <a:ext cx="2160000" cy="14553"/>
+          <a:xfrm>
+            <a:off x="1980000" y="1873800"/>
+            <a:ext cx="2160000" cy="0"/>
           </a:xfrm>
           <a:prstGeom prst="straightConnector1">
             <a:avLst/>
@@ -11274,8 +11243,8 @@
         </p:nvCxnSpPr>
         <p:spPr>
           <a:xfrm>
-            <a:off x="4860000" y="2300021"/>
-            <a:ext cx="0" cy="336752"/>
+            <a:off x="4860000" y="2307600"/>
+            <a:ext cx="0" cy="392400"/>
           </a:xfrm>
           <a:prstGeom prst="straightConnector1">
             <a:avLst/>
@@ -11322,9 +11291,9 @@
           <p:nvPr/>
         </p:nvCxnSpPr>
         <p:spPr>
-          <a:xfrm flipV="1">
-            <a:off x="9180000" y="5461803"/>
-            <a:ext cx="360000" cy="9525"/>
+          <a:xfrm>
+            <a:off x="9180000" y="5473800"/>
+            <a:ext cx="360000" cy="0"/>
           </a:xfrm>
           <a:prstGeom prst="straightConnector1">
             <a:avLst/>
@@ -11372,8 +11341,8 @@
         </p:nvCxnSpPr>
         <p:spPr>
           <a:xfrm flipV="1">
-            <a:off x="1260000" y="4695824"/>
-            <a:ext cx="0" cy="323025"/>
+            <a:off x="1260000" y="4647600"/>
+            <a:ext cx="0" cy="392400"/>
           </a:xfrm>
           <a:prstGeom prst="straightConnector1">
             <a:avLst/>
@@ -11420,9 +11389,9 @@
           <p:nvPr/>
         </p:nvCxnSpPr>
         <p:spPr>
-          <a:xfrm flipH="1" flipV="1">
-            <a:off x="9180000" y="1880774"/>
-            <a:ext cx="360000" cy="2551"/>
+          <a:xfrm flipH="1">
+            <a:off x="9180000" y="1873800"/>
+            <a:ext cx="360000" cy="0"/>
           </a:xfrm>
           <a:prstGeom prst="straightConnector1">
             <a:avLst/>
@@ -11470,8 +11439,8 @@
         </p:nvCxnSpPr>
         <p:spPr>
           <a:xfrm>
-            <a:off x="8460000" y="2314574"/>
-            <a:ext cx="0" cy="323025"/>
+            <a:off x="8460000" y="2307600"/>
+            <a:ext cx="0" cy="392400"/>
           </a:xfrm>
           <a:prstGeom prst="straightConnector1">
             <a:avLst/>
@@ -11519,8 +11488,8 @@
         </p:nvCxnSpPr>
         <p:spPr>
           <a:xfrm>
-            <a:off x="5580000" y="3070573"/>
-            <a:ext cx="360000" cy="826"/>
+            <a:off x="5580000" y="3133800"/>
+            <a:ext cx="360000" cy="0"/>
           </a:xfrm>
           <a:prstGeom prst="straightConnector1">
             <a:avLst/>
@@ -11568,8 +11537,8 @@
         </p:nvCxnSpPr>
         <p:spPr>
           <a:xfrm>
-            <a:off x="6660000" y="3505199"/>
-            <a:ext cx="0" cy="323025"/>
+            <a:off x="6660000" y="3567600"/>
+            <a:ext cx="0" cy="212400"/>
           </a:xfrm>
           <a:prstGeom prst="straightConnector1">
             <a:avLst/>
@@ -11617,8 +11586,8 @@
         </p:nvCxnSpPr>
         <p:spPr>
           <a:xfrm>
-            <a:off x="6660000" y="4695824"/>
-            <a:ext cx="0" cy="341704"/>
+            <a:off x="6660000" y="4647600"/>
+            <a:ext cx="0" cy="392400"/>
           </a:xfrm>
           <a:prstGeom prst="straightConnector1">
             <a:avLst/>
@@ -11656,7 +11625,7 @@
         </p:nvGrpSpPr>
         <p:grpSpPr>
           <a:xfrm>
-            <a:off x="540000" y="5018849"/>
+            <a:off x="540000" y="5040000"/>
             <a:ext cx="1440000" cy="867600"/>
             <a:chOff x="624215" y="5142674"/>
             <a:chExt cx="1440000" cy="867600"/>
@@ -11833,7 +11802,7 @@
         </p:nvGrpSpPr>
         <p:grpSpPr>
           <a:xfrm>
-            <a:off x="9540000" y="1449525"/>
+            <a:off x="9540000" y="1440000"/>
             <a:ext cx="1440000" cy="867600"/>
             <a:chOff x="10196840" y="1570799"/>
             <a:chExt cx="1440000" cy="867600"/>
@@ -12008,7 +11977,7 @@
         </p:nvGrpSpPr>
         <p:grpSpPr>
           <a:xfrm>
-            <a:off x="9540000" y="5028003"/>
+            <a:off x="9540000" y="5040000"/>
             <a:ext cx="1440000" cy="867600"/>
             <a:chOff x="10196840" y="5161353"/>
             <a:chExt cx="1440000" cy="867600"/>
@@ -12183,7 +12152,7 @@
         </p:nvGrpSpPr>
         <p:grpSpPr>
           <a:xfrm>
-            <a:off x="540000" y="3828224"/>
+            <a:off x="540000" y="3780000"/>
             <a:ext cx="1440000" cy="867600"/>
             <a:chOff x="622908" y="3952049"/>
             <a:chExt cx="1440000" cy="867600"/>
@@ -12372,7 +12341,7 @@
         </p:nvGrpSpPr>
         <p:grpSpPr>
           <a:xfrm>
-            <a:off x="540000" y="2637599"/>
+            <a:off x="540000" y="2700000"/>
             <a:ext cx="1440000" cy="867600"/>
             <a:chOff x="624215" y="2761424"/>
             <a:chExt cx="1440000" cy="867600"/>
@@ -12553,7 +12522,7 @@
         </p:nvGrpSpPr>
         <p:grpSpPr>
           <a:xfrm>
-            <a:off x="4140000" y="2636773"/>
+            <a:off x="4140000" y="2700000"/>
             <a:ext cx="1440000" cy="867600"/>
             <a:chOff x="5009244" y="1578083"/>
             <a:chExt cx="1440000" cy="867600"/>
@@ -12730,7 +12699,7 @@
         </p:nvGrpSpPr>
         <p:grpSpPr>
           <a:xfrm>
-            <a:off x="5940000" y="2637599"/>
+            <a:off x="5940000" y="2700000"/>
             <a:ext cx="1440000" cy="867600"/>
             <a:chOff x="5005715" y="2776165"/>
             <a:chExt cx="1440000" cy="867600"/>
@@ -12911,7 +12880,7 @@
         </p:nvGrpSpPr>
         <p:grpSpPr>
           <a:xfrm>
-            <a:off x="5940000" y="5037528"/>
+            <a:off x="5940000" y="5040000"/>
             <a:ext cx="1440000" cy="867600"/>
             <a:chOff x="5005715" y="5161353"/>
             <a:chExt cx="1440000" cy="867600"/>
@@ -13088,7 +13057,7 @@
         </p:nvGrpSpPr>
         <p:grpSpPr>
           <a:xfrm>
-            <a:off x="7740000" y="1446974"/>
+            <a:off x="7740000" y="1440000"/>
             <a:ext cx="1440000" cy="867600"/>
             <a:chOff x="7996042" y="1570799"/>
             <a:chExt cx="1440000" cy="867600"/>
@@ -13277,7 +13246,7 @@
         </p:nvGrpSpPr>
         <p:grpSpPr>
           <a:xfrm>
-            <a:off x="7740000" y="5037528"/>
+            <a:off x="7740000" y="5040000"/>
             <a:ext cx="1440000" cy="867600"/>
             <a:chOff x="8006090" y="5161353"/>
             <a:chExt cx="1440000" cy="867600"/>
@@ -13460,7 +13429,7 @@
         </p:nvGrpSpPr>
         <p:grpSpPr>
           <a:xfrm>
-            <a:off x="4140000" y="1432421"/>
+            <a:off x="4140000" y="1440000"/>
             <a:ext cx="1440000" cy="867600"/>
             <a:chOff x="2783916" y="1570799"/>
             <a:chExt cx="1440000" cy="867600"/>
@@ -13643,7 +13612,7 @@
         </p:nvGrpSpPr>
         <p:grpSpPr>
           <a:xfrm>
-            <a:off x="540000" y="1446974"/>
+            <a:off x="540000" y="1440000"/>
             <a:ext cx="1440000" cy="867600"/>
             <a:chOff x="617904" y="1570799"/>
             <a:chExt cx="1440000" cy="867600"/>
@@ -13826,7 +13795,7 @@
         </p:nvGrpSpPr>
         <p:grpSpPr>
           <a:xfrm>
-            <a:off x="7740000" y="2637599"/>
+            <a:off x="7740000" y="2700000"/>
             <a:ext cx="1440000" cy="867600"/>
             <a:chOff x="8006090" y="2794529"/>
             <a:chExt cx="1440000" cy="867600"/>
@@ -14007,7 +13976,7 @@
         </p:nvGrpSpPr>
         <p:grpSpPr>
           <a:xfrm>
-            <a:off x="5940000" y="3828224"/>
+            <a:off x="5940000" y="3780000"/>
             <a:ext cx="1440000" cy="867600"/>
             <a:chOff x="2783916" y="1570799"/>
             <a:chExt cx="1440000" cy="867600"/>
@@ -14194,8 +14163,8 @@
         </p:nvCxnSpPr>
         <p:spPr>
           <a:xfrm flipH="1">
-            <a:off x="8460000" y="2317125"/>
-            <a:ext cx="1800000" cy="2720403"/>
+            <a:off x="8460000" y="2307600"/>
+            <a:ext cx="1800000" cy="2732400"/>
           </a:xfrm>
           <a:prstGeom prst="straightConnector1">
             <a:avLst/>
@@ -14233,7 +14202,7 @@
         </p:nvSpPr>
         <p:spPr>
           <a:xfrm>
-            <a:off x="496800" y="2594399"/>
+            <a:off x="496800" y="2656800"/>
             <a:ext cx="1526400" cy="954000"/>
           </a:xfrm>
           <a:prstGeom prst="roundRect">
@@ -14261,7 +14230,7 @@
         </p:nvSpPr>
         <p:spPr>
           <a:xfrm>
-            <a:off x="5896800" y="3785024"/>
+            <a:off x="5896800" y="3736800"/>
             <a:ext cx="1526400" cy="954000"/>
           </a:xfrm>
           <a:prstGeom prst="roundRect">
@@ -14393,8 +14362,8 @@
         </p:nvCxnSpPr>
         <p:spPr>
           <a:xfrm flipV="1">
-            <a:off x="1260000" y="3505199"/>
-            <a:ext cx="0" cy="323025"/>
+            <a:off x="1260000" y="3567600"/>
+            <a:ext cx="0" cy="212400"/>
           </a:xfrm>
           <a:prstGeom prst="straightConnector1">
             <a:avLst/>
@@ -14442,8 +14411,8 @@
         </p:nvCxnSpPr>
         <p:spPr>
           <a:xfrm flipV="1">
-            <a:off x="1260000" y="2314574"/>
-            <a:ext cx="0" cy="323025"/>
+            <a:off x="1260000" y="2307600"/>
+            <a:ext cx="0" cy="392400"/>
           </a:xfrm>
           <a:prstGeom prst="straightConnector1">
             <a:avLst/>
@@ -14491,7 +14460,7 @@
         </p:nvCxnSpPr>
         <p:spPr>
           <a:xfrm>
-            <a:off x="7380000" y="5471328"/>
+            <a:off x="7380000" y="5473800"/>
             <a:ext cx="360000" cy="0"/>
           </a:xfrm>
           <a:prstGeom prst="straightConnector1">
@@ -14540,7 +14509,7 @@
         </p:nvCxnSpPr>
         <p:spPr>
           <a:xfrm flipH="1">
-            <a:off x="7380000" y="3071399"/>
+            <a:off x="7380000" y="3133800"/>
             <a:ext cx="360000" cy="0"/>
           </a:xfrm>
           <a:prstGeom prst="straightConnector1">
@@ -14588,9 +14557,9 @@
           <p:nvPr/>
         </p:nvCxnSpPr>
         <p:spPr>
-          <a:xfrm flipV="1">
-            <a:off x="1980000" y="1866221"/>
-            <a:ext cx="2160000" cy="14553"/>
+          <a:xfrm>
+            <a:off x="1980000" y="1873800"/>
+            <a:ext cx="2160000" cy="0"/>
           </a:xfrm>
           <a:prstGeom prst="straightConnector1">
             <a:avLst/>
@@ -14638,8 +14607,8 @@
         </p:nvCxnSpPr>
         <p:spPr>
           <a:xfrm>
-            <a:off x="4860000" y="2300021"/>
-            <a:ext cx="0" cy="336752"/>
+            <a:off x="4860000" y="2307600"/>
+            <a:ext cx="0" cy="392400"/>
           </a:xfrm>
           <a:prstGeom prst="straightConnector1">
             <a:avLst/>
@@ -14686,9 +14655,9 @@
           <p:nvPr/>
         </p:nvCxnSpPr>
         <p:spPr>
-          <a:xfrm flipV="1">
-            <a:off x="9180000" y="5461803"/>
-            <a:ext cx="360000" cy="9525"/>
+          <a:xfrm>
+            <a:off x="9180000" y="5473800"/>
+            <a:ext cx="360000" cy="0"/>
           </a:xfrm>
           <a:prstGeom prst="straightConnector1">
             <a:avLst/>
@@ -14736,8 +14705,8 @@
         </p:nvCxnSpPr>
         <p:spPr>
           <a:xfrm flipV="1">
-            <a:off x="1260000" y="4695824"/>
-            <a:ext cx="0" cy="323025"/>
+            <a:off x="1260000" y="4647600"/>
+            <a:ext cx="0" cy="392400"/>
           </a:xfrm>
           <a:prstGeom prst="straightConnector1">
             <a:avLst/>
@@ -14784,9 +14753,9 @@
           <p:nvPr/>
         </p:nvCxnSpPr>
         <p:spPr>
-          <a:xfrm flipH="1" flipV="1">
-            <a:off x="9180000" y="1880774"/>
-            <a:ext cx="360000" cy="2551"/>
+          <a:xfrm flipH="1">
+            <a:off x="9180000" y="1873800"/>
+            <a:ext cx="360000" cy="0"/>
           </a:xfrm>
           <a:prstGeom prst="straightConnector1">
             <a:avLst/>
@@ -14834,8 +14803,8 @@
         </p:nvCxnSpPr>
         <p:spPr>
           <a:xfrm>
-            <a:off x="8460000" y="2314574"/>
-            <a:ext cx="0" cy="323025"/>
+            <a:off x="8460000" y="2307600"/>
+            <a:ext cx="0" cy="392400"/>
           </a:xfrm>
           <a:prstGeom prst="straightConnector1">
             <a:avLst/>
@@ -14883,8 +14852,8 @@
         </p:nvCxnSpPr>
         <p:spPr>
           <a:xfrm>
-            <a:off x="5580000" y="3070573"/>
-            <a:ext cx="360000" cy="826"/>
+            <a:off x="5580000" y="3133800"/>
+            <a:ext cx="360000" cy="0"/>
           </a:xfrm>
           <a:prstGeom prst="straightConnector1">
             <a:avLst/>
@@ -14932,8 +14901,8 @@
         </p:nvCxnSpPr>
         <p:spPr>
           <a:xfrm>
-            <a:off x="6660000" y="3505199"/>
-            <a:ext cx="0" cy="323025"/>
+            <a:off x="6660000" y="3567600"/>
+            <a:ext cx="0" cy="212400"/>
           </a:xfrm>
           <a:prstGeom prst="straightConnector1">
             <a:avLst/>
@@ -14981,7 +14950,7 @@
         </p:nvCxnSpPr>
         <p:spPr>
           <a:xfrm>
-            <a:off x="1980000" y="4262024"/>
+            <a:off x="1980000" y="4213800"/>
             <a:ext cx="360000" cy="0"/>
           </a:xfrm>
           <a:prstGeom prst="straightConnector1">
@@ -15030,7 +14999,7 @@
         </p:nvCxnSpPr>
         <p:spPr>
           <a:xfrm>
-            <a:off x="3780000" y="4262024"/>
+            <a:off x="3780000" y="4213800"/>
             <a:ext cx="360000" cy="0"/>
           </a:xfrm>
           <a:prstGeom prst="straightConnector1">
@@ -15079,8 +15048,8 @@
         </p:nvCxnSpPr>
         <p:spPr>
           <a:xfrm>
-            <a:off x="6660000" y="4695824"/>
-            <a:ext cx="0" cy="341704"/>
+            <a:off x="6660000" y="4647600"/>
+            <a:ext cx="0" cy="392400"/>
           </a:xfrm>
           <a:prstGeom prst="straightConnector1">
             <a:avLst/>
@@ -15128,7 +15097,7 @@
         </p:nvCxnSpPr>
         <p:spPr>
           <a:xfrm>
-            <a:off x="5580000" y="4262024"/>
+            <a:off x="5580000" y="4213800"/>
             <a:ext cx="360000" cy="0"/>
           </a:xfrm>
           <a:prstGeom prst="straightConnector1">
@@ -15167,7 +15136,7 @@
         </p:nvGrpSpPr>
         <p:grpSpPr>
           <a:xfrm>
-            <a:off x="540000" y="5018849"/>
+            <a:off x="540000" y="5040000"/>
             <a:ext cx="1440000" cy="867600"/>
             <a:chOff x="624215" y="5142674"/>
             <a:chExt cx="1440000" cy="867600"/>
@@ -15344,7 +15313,7 @@
         </p:nvGrpSpPr>
         <p:grpSpPr>
           <a:xfrm>
-            <a:off x="9540000" y="1449525"/>
+            <a:off x="9540000" y="1440000"/>
             <a:ext cx="1440000" cy="867600"/>
             <a:chOff x="10196840" y="1570799"/>
             <a:chExt cx="1440000" cy="867600"/>
@@ -15519,7 +15488,7 @@
         </p:nvGrpSpPr>
         <p:grpSpPr>
           <a:xfrm>
-            <a:off x="9540000" y="5028003"/>
+            <a:off x="9540000" y="5040000"/>
             <a:ext cx="1440000" cy="867600"/>
             <a:chOff x="10196840" y="5161353"/>
             <a:chExt cx="1440000" cy="867600"/>
@@ -15694,7 +15663,7 @@
         </p:nvGrpSpPr>
         <p:grpSpPr>
           <a:xfrm>
-            <a:off x="540000" y="3828224"/>
+            <a:off x="540000" y="3780000"/>
             <a:ext cx="1440000" cy="867600"/>
             <a:chOff x="622908" y="3952049"/>
             <a:chExt cx="1440000" cy="867600"/>
@@ -15883,7 +15852,7 @@
         </p:nvGrpSpPr>
         <p:grpSpPr>
           <a:xfrm>
-            <a:off x="540000" y="2637599"/>
+            <a:off x="540000" y="2700000"/>
             <a:ext cx="1440000" cy="867600"/>
             <a:chOff x="624215" y="2761424"/>
             <a:chExt cx="1440000" cy="867600"/>
@@ -16064,7 +16033,7 @@
         </p:nvGrpSpPr>
         <p:grpSpPr>
           <a:xfrm>
-            <a:off x="4140000" y="2636773"/>
+            <a:off x="4140000" y="2700000"/>
             <a:ext cx="1440000" cy="867600"/>
             <a:chOff x="5009244" y="1578083"/>
             <a:chExt cx="1440000" cy="867600"/>
@@ -16241,7 +16210,7 @@
         </p:nvGrpSpPr>
         <p:grpSpPr>
           <a:xfrm>
-            <a:off x="5940000" y="2637599"/>
+            <a:off x="5940000" y="2700000"/>
             <a:ext cx="1440000" cy="867600"/>
             <a:chOff x="5005715" y="2776165"/>
             <a:chExt cx="1440000" cy="867600"/>
@@ -16422,7 +16391,7 @@
         </p:nvGrpSpPr>
         <p:grpSpPr>
           <a:xfrm>
-            <a:off x="5940000" y="5037528"/>
+            <a:off x="5940000" y="5040000"/>
             <a:ext cx="1440000" cy="867600"/>
             <a:chOff x="5005715" y="5161353"/>
             <a:chExt cx="1440000" cy="867600"/>
@@ -16599,7 +16568,7 @@
         </p:nvGrpSpPr>
         <p:grpSpPr>
           <a:xfrm>
-            <a:off x="7740000" y="1446974"/>
+            <a:off x="7740000" y="1440000"/>
             <a:ext cx="1440000" cy="867600"/>
             <a:chOff x="7996042" y="1570799"/>
             <a:chExt cx="1440000" cy="867600"/>
@@ -16788,7 +16757,7 @@
         </p:nvGrpSpPr>
         <p:grpSpPr>
           <a:xfrm>
-            <a:off x="7740000" y="5037528"/>
+            <a:off x="7740000" y="5040000"/>
             <a:ext cx="1440000" cy="867600"/>
             <a:chOff x="8006090" y="5161353"/>
             <a:chExt cx="1440000" cy="867600"/>
@@ -16971,7 +16940,7 @@
         </p:nvGrpSpPr>
         <p:grpSpPr>
           <a:xfrm>
-            <a:off x="4140000" y="1432421"/>
+            <a:off x="4140000" y="1440000"/>
             <a:ext cx="1440000" cy="867600"/>
             <a:chOff x="2783916" y="1570799"/>
             <a:chExt cx="1440000" cy="867600"/>
@@ -17154,7 +17123,7 @@
         </p:nvGrpSpPr>
         <p:grpSpPr>
           <a:xfrm>
-            <a:off x="540000" y="1446974"/>
+            <a:off x="540000" y="1440000"/>
             <a:ext cx="1440000" cy="867600"/>
             <a:chOff x="617904" y="1570799"/>
             <a:chExt cx="1440000" cy="867600"/>
@@ -17337,7 +17306,7 @@
         </p:nvGrpSpPr>
         <p:grpSpPr>
           <a:xfrm>
-            <a:off x="7740000" y="2637599"/>
+            <a:off x="7740000" y="2700000"/>
             <a:ext cx="1440000" cy="867600"/>
             <a:chOff x="8006090" y="2794529"/>
             <a:chExt cx="1440000" cy="867600"/>
@@ -17518,7 +17487,7 @@
         </p:nvGrpSpPr>
         <p:grpSpPr>
           <a:xfrm>
-            <a:off x="2340000" y="3828224"/>
+            <a:off x="2340000" y="3780000"/>
             <a:ext cx="1440000" cy="867600"/>
             <a:chOff x="2783916" y="1570799"/>
             <a:chExt cx="1440000" cy="867600"/>
@@ -17707,7 +17676,7 @@
         </p:nvGrpSpPr>
         <p:grpSpPr>
           <a:xfrm>
-            <a:off x="4140000" y="3828224"/>
+            <a:off x="4140000" y="3780000"/>
             <a:ext cx="1440000" cy="867600"/>
             <a:chOff x="5005715" y="2776165"/>
             <a:chExt cx="1440000" cy="867600"/>
@@ -17894,7 +17863,7 @@
         </p:nvGrpSpPr>
         <p:grpSpPr>
           <a:xfrm>
-            <a:off x="5940000" y="3828224"/>
+            <a:off x="5940000" y="3780000"/>
             <a:ext cx="1440000" cy="867600"/>
             <a:chOff x="2783916" y="1570799"/>
             <a:chExt cx="1440000" cy="867600"/>
@@ -18081,8 +18050,8 @@
         </p:nvCxnSpPr>
         <p:spPr>
           <a:xfrm flipH="1">
-            <a:off x="8460000" y="2317125"/>
-            <a:ext cx="1800000" cy="2720403"/>
+            <a:off x="8460000" y="2307600"/>
+            <a:ext cx="1800000" cy="2732400"/>
           </a:xfrm>
           <a:prstGeom prst="straightConnector1">
             <a:avLst/>
@@ -18120,7 +18089,7 @@
         </p:nvSpPr>
         <p:spPr>
           <a:xfrm>
-            <a:off x="4096800" y="3785024"/>
+            <a:off x="4096800" y="3736800"/>
             <a:ext cx="1526400" cy="954000"/>
           </a:xfrm>
           <a:prstGeom prst="roundRect">
@@ -18148,7 +18117,7 @@
         </p:nvSpPr>
         <p:spPr>
           <a:xfrm>
-            <a:off x="2296800" y="3785024"/>
+            <a:off x="2296800" y="3736800"/>
             <a:ext cx="1526400" cy="954000"/>
           </a:xfrm>
           <a:prstGeom prst="roundRect">
